--- a/out/ppt/WISE_L01_수업.pptx
+++ b/out/ppt/WISE_L01_수업.pptx
@@ -16,6 +16,11 @@
     <p:sldId id="264" r:id="rId16"/>
     <p:sldId id="265" r:id="rId17"/>
     <p:sldId id="266" r:id="rId18"/>
+    <p:sldId id="267" r:id="rId19"/>
+    <p:sldId id="268" r:id="rId20"/>
+    <p:sldId id="269" r:id="rId21"/>
+    <p:sldId id="270" r:id="rId22"/>
+    <p:sldId id="271" r:id="rId23"/>
   </p:sldIdLst>
   <p:sldSz cx="12191695" cy="6858000" type="screen4x3"/>
   <p:notesSz cx="6858000" cy="9144000"/>
@@ -587,28 +592,23 @@
           <a:lstStyle/>
           <a:p>
             <a:r>
-              <a:t>◎ 다음 차시 예고</a:t>
-            </a:r>
-          </a:p>
-          <a:p>
-            <a:r>
-              <a:t>- 다음 시간에는 AI의 답이 늘 옳은지 확인해 봅시다.</a:t>
+              <a:t>3단계 · 11분</a:t>
+            </a:r>
+          </a:p>
+          <a:p>
+            <a:r>
+              <a:t>학습 버튼을 누르면 브라우저 안에서 진짜 모델이 학습한다. 시험 카드 여섯 장으로 정확도를 재고, 모델이 어떤 특징을 근거로 삼았는지 막대로 확인한다.</a:t>
             </a:r>
           </a:p>
           <a:p/>
           <a:p>
             <a:r>
-              <a:t>준비물</a:t>
-            </a:r>
-          </a:p>
-          <a:p>
-            <a:r>
-              <a:t>★ 배움 공책</a:t>
-            </a:r>
-          </a:p>
-          <a:p>
-            <a:r>
-              <a:t>△ 사람의 판단 역할에 초점</a:t>
+              <a:t>발문 : AI는 무엇을 보고 판단했나요?</a:t>
+            </a:r>
+          </a:p>
+          <a:p>
+            <a:r>
+              <a:t>예상 답변 : 귀 모양을 가장 크게 보고 판단했습니다.</a:t>
             </a:r>
           </a:p>
         </p:txBody>
@@ -678,6 +678,450 @@
           <a:lstStyle/>
           <a:p>
             <a:r>
+              <a:t>4단계 · 10분</a:t>
+            </a:r>
+          </a:p>
+          <a:p>
+            <a:r>
+              <a:t>고양이 카드를 줄여 다시 학습시킨다. 정확도가 떨어지고 어떤 시험 카드가 틀리게 바뀌는지 표시된다.</a:t>
+            </a:r>
+          </a:p>
+          <a:p/>
+          <a:p>
+            <a:r>
+              <a:t>발문 : 왜 고양이를 자주 틀리게 되었을까요?</a:t>
+            </a:r>
+          </a:p>
+          <a:p>
+            <a:r>
+              <a:t>예상 답변 : 고양이를 적게 배웠기 때문입니다.</a:t>
+            </a:r>
+          </a:p>
+        </p:txBody>
+      </p:sp>
+      <p:sp>
+        <p:nvSpPr>
+          <p:cNvPr id="4" name="Slide Number Placeholder 3"/>
+          <p:cNvSpPr>
+            <a:spLocks noGrp="1"/>
+          </p:cNvSpPr>
+          <p:nvPr>
+            <p:ph type="sldNum" idx="5" sz="quarter"/>
+          </p:nvPr>
+        </p:nvSpPr>
+        <p:spPr/>
+      </p:sp>
+    </p:spTree>
+  </p:cSld>
+  <p:clrMapOvr>
+    <a:masterClrMapping/>
+  </p:clrMapOvr>
+</p:notes>
+</file>
+
+<file path=ppt/notesSlides/notesSlide12.xml><?xml version="1.0" encoding="utf-8"?>
+<p:notes xmlns:a="http://schemas.openxmlformats.org/drawingml/2006/main" xmlns:p="http://schemas.openxmlformats.org/presentationml/2006/main" xmlns:r="http://schemas.openxmlformats.org/officeDocument/2006/relationships">
+  <p:cSld>
+    <p:spTree>
+      <p:nvGrpSpPr>
+        <p:cNvPr id="1" name=""/>
+        <p:cNvGrpSpPr/>
+        <p:nvPr/>
+      </p:nvGrpSpPr>
+      <p:grpSpPr>
+        <a:xfrm>
+          <a:off x="0" y="0"/>
+          <a:ext cx="0" cy="0"/>
+          <a:chOff x="0" y="0"/>
+          <a:chExt cx="0" cy="0"/>
+        </a:xfrm>
+      </p:grpSpPr>
+      <p:sp>
+        <p:nvSpPr>
+          <p:cNvPr id="2" name="Slide Image Placeholder 1"/>
+          <p:cNvSpPr>
+            <a:spLocks noGrp="1"/>
+          </p:cNvSpPr>
+          <p:nvPr>
+            <p:ph type="sldImg" idx="2"/>
+          </p:nvPr>
+        </p:nvSpPr>
+        <p:spPr/>
+      </p:sp>
+      <p:sp>
+        <p:nvSpPr>
+          <p:cNvPr id="3" name="Notes Placeholder 2"/>
+          <p:cNvSpPr>
+            <a:spLocks noGrp="1"/>
+          </p:cNvSpPr>
+          <p:nvPr>
+            <p:ph type="body" idx="3" sz="quarter"/>
+          </p:nvPr>
+        </p:nvSpPr>
+        <p:spPr/>
+        <p:txBody>
+          <a:bodyPr/>
+          <a:lstStyle/>
+          <a:p>
+            <a:r>
+              <a:t>5단계 · 5분</a:t>
+            </a:r>
+          </a:p>
+          <a:p>
+            <a:r>
+              <a:t>수업에서 있었던 일 열 가지를 사람 칸과 AI 칸으로 나눈다.</a:t>
+            </a:r>
+          </a:p>
+          <a:p/>
+          <a:p>
+            <a:r>
+              <a:t>발문 : AI를 똑똑하게 만든 것은 누구일까요?</a:t>
+            </a:r>
+          </a:p>
+          <a:p>
+            <a:r>
+              <a:t>예상 답변 : 데이터를 모으고 이름표를 붙인 사람입니다.</a:t>
+            </a:r>
+          </a:p>
+        </p:txBody>
+      </p:sp>
+      <p:sp>
+        <p:nvSpPr>
+          <p:cNvPr id="4" name="Slide Number Placeholder 3"/>
+          <p:cNvSpPr>
+            <a:spLocks noGrp="1"/>
+          </p:cNvSpPr>
+          <p:nvPr>
+            <p:ph type="sldNum" idx="5" sz="quarter"/>
+          </p:nvPr>
+        </p:nvSpPr>
+        <p:spPr/>
+      </p:sp>
+    </p:spTree>
+  </p:cSld>
+  <p:clrMapOvr>
+    <a:masterClrMapping/>
+  </p:clrMapOvr>
+</p:notes>
+</file>
+
+<file path=ppt/notesSlides/notesSlide13.xml><?xml version="1.0" encoding="utf-8"?>
+<p:notes xmlns:a="http://schemas.openxmlformats.org/drawingml/2006/main" xmlns:p="http://schemas.openxmlformats.org/presentationml/2006/main" xmlns:r="http://schemas.openxmlformats.org/officeDocument/2006/relationships">
+  <p:cSld>
+    <p:spTree>
+      <p:nvGrpSpPr>
+        <p:cNvPr id="1" name=""/>
+        <p:cNvGrpSpPr/>
+        <p:nvPr/>
+      </p:nvGrpSpPr>
+      <p:grpSpPr>
+        <a:xfrm>
+          <a:off x="0" y="0"/>
+          <a:ext cx="0" cy="0"/>
+          <a:chOff x="0" y="0"/>
+          <a:chExt cx="0" cy="0"/>
+        </a:xfrm>
+      </p:grpSpPr>
+      <p:sp>
+        <p:nvSpPr>
+          <p:cNvPr id="2" name="Slide Image Placeholder 1"/>
+          <p:cNvSpPr>
+            <a:spLocks noGrp="1"/>
+          </p:cNvSpPr>
+          <p:nvPr>
+            <p:ph type="sldImg" idx="2"/>
+          </p:nvPr>
+        </p:nvSpPr>
+        <p:spPr/>
+      </p:sp>
+      <p:sp>
+        <p:nvSpPr>
+          <p:cNvPr id="3" name="Notes Placeholder 2"/>
+          <p:cNvSpPr>
+            <a:spLocks noGrp="1"/>
+          </p:cNvSpPr>
+          <p:nvPr>
+            <p:ph type="body" idx="3" sz="quarter"/>
+          </p:nvPr>
+        </p:nvSpPr>
+        <p:spPr/>
+        <p:txBody>
+          <a:bodyPr/>
+          <a:lstStyle/>
+          <a:p>
+            <a:r>
+              <a:t>1인 1기기가 아니어도 모두 참여하게 한다.</a:t>
+            </a:r>
+          </a:p>
+          <a:p>
+            <a:r>
+              <a:t>정확도 경쟁으로 흐르지 않게 한다. 틀린 까닭을 데이터에서 찾는 것이 목표다.</a:t>
+            </a:r>
+          </a:p>
+          <a:p>
+            <a:r>
+              <a:t>라벨이 갈린 카드는 누가 맞았는지 가리지 않고, 사람마다 다르게 볼 수 있음을 짚는다.</a:t>
+            </a:r>
+          </a:p>
+          <a:p>
+            <a:r>
+              <a:t>개인정보가 담긴 사진은 쓰지 않는다. 이 앱은 사진을 올릴 수 없게 만들었다.</a:t>
+            </a:r>
+          </a:p>
+        </p:txBody>
+      </p:sp>
+      <p:sp>
+        <p:nvSpPr>
+          <p:cNvPr id="4" name="Slide Number Placeholder 3"/>
+          <p:cNvSpPr>
+            <a:spLocks noGrp="1"/>
+          </p:cNvSpPr>
+          <p:nvPr>
+            <p:ph type="sldNum" idx="5" sz="quarter"/>
+          </p:nvPr>
+        </p:nvSpPr>
+        <p:spPr/>
+      </p:sp>
+    </p:spTree>
+  </p:cSld>
+  <p:clrMapOvr>
+    <a:masterClrMapping/>
+  </p:clrMapOvr>
+</p:notes>
+</file>
+
+<file path=ppt/notesSlides/notesSlide14.xml><?xml version="1.0" encoding="utf-8"?>
+<p:notes xmlns:a="http://schemas.openxmlformats.org/drawingml/2006/main" xmlns:p="http://schemas.openxmlformats.org/presentationml/2006/main" xmlns:r="http://schemas.openxmlformats.org/officeDocument/2006/relationships">
+  <p:cSld>
+    <p:spTree>
+      <p:nvGrpSpPr>
+        <p:cNvPr id="1" name=""/>
+        <p:cNvGrpSpPr/>
+        <p:nvPr/>
+      </p:nvGrpSpPr>
+      <p:grpSpPr>
+        <a:xfrm>
+          <a:off x="0" y="0"/>
+          <a:ext cx="0" cy="0"/>
+          <a:chOff x="0" y="0"/>
+          <a:chExt cx="0" cy="0"/>
+        </a:xfrm>
+      </p:grpSpPr>
+      <p:sp>
+        <p:nvSpPr>
+          <p:cNvPr id="2" name="Slide Image Placeholder 1"/>
+          <p:cNvSpPr>
+            <a:spLocks noGrp="1"/>
+          </p:cNvSpPr>
+          <p:nvPr>
+            <p:ph type="sldImg" idx="2"/>
+          </p:nvPr>
+        </p:nvSpPr>
+        <p:spPr/>
+      </p:sp>
+      <p:sp>
+        <p:nvSpPr>
+          <p:cNvPr id="3" name="Notes Placeholder 2"/>
+          <p:cNvSpPr>
+            <a:spLocks noGrp="1"/>
+          </p:cNvSpPr>
+          <p:nvPr>
+            <p:ph type="body" idx="3" sz="quarter"/>
+          </p:nvPr>
+        </p:nvSpPr>
+        <p:spPr/>
+        <p:txBody>
+          <a:bodyPr/>
+          <a:lstStyle/>
+          <a:p>
+            <a:r>
+              <a:t>◎ 배움 정리</a:t>
+            </a:r>
+          </a:p>
+          <a:p>
+            <a:r>
+              <a:t>- 오늘 알게 된 점을 한 문장으로 말해 봅시다.</a:t>
+            </a:r>
+          </a:p>
+          <a:p>
+            <a:r>
+              <a:t>  · AI는 사람이 준 데이터로 배우고, 데이터에 따라 결과가 달라집니다.</a:t>
+            </a:r>
+          </a:p>
+          <a:p/>
+          <a:p>
+            <a:r>
+              <a:t>준비물</a:t>
+            </a:r>
+          </a:p>
+          <a:p>
+            <a:r>
+              <a:t>★ 배움 공책</a:t>
+            </a:r>
+          </a:p>
+          <a:p>
+            <a:r>
+              <a:t>△ 사람의 판단 역할에 초점</a:t>
+            </a:r>
+          </a:p>
+        </p:txBody>
+      </p:sp>
+      <p:sp>
+        <p:nvSpPr>
+          <p:cNvPr id="4" name="Slide Number Placeholder 3"/>
+          <p:cNvSpPr>
+            <a:spLocks noGrp="1"/>
+          </p:cNvSpPr>
+          <p:nvPr>
+            <p:ph type="sldNum" idx="5" sz="quarter"/>
+          </p:nvPr>
+        </p:nvSpPr>
+        <p:spPr/>
+      </p:sp>
+    </p:spTree>
+  </p:cSld>
+  <p:clrMapOvr>
+    <a:masterClrMapping/>
+  </p:clrMapOvr>
+</p:notes>
+</file>
+
+<file path=ppt/notesSlides/notesSlide15.xml><?xml version="1.0" encoding="utf-8"?>
+<p:notes xmlns:a="http://schemas.openxmlformats.org/drawingml/2006/main" xmlns:p="http://schemas.openxmlformats.org/presentationml/2006/main" xmlns:r="http://schemas.openxmlformats.org/officeDocument/2006/relationships">
+  <p:cSld>
+    <p:spTree>
+      <p:nvGrpSpPr>
+        <p:cNvPr id="1" name=""/>
+        <p:cNvGrpSpPr/>
+        <p:nvPr/>
+      </p:nvGrpSpPr>
+      <p:grpSpPr>
+        <a:xfrm>
+          <a:off x="0" y="0"/>
+          <a:ext cx="0" cy="0"/>
+          <a:chOff x="0" y="0"/>
+          <a:chExt cx="0" cy="0"/>
+        </a:xfrm>
+      </p:grpSpPr>
+      <p:sp>
+        <p:nvSpPr>
+          <p:cNvPr id="2" name="Slide Image Placeholder 1"/>
+          <p:cNvSpPr>
+            <a:spLocks noGrp="1"/>
+          </p:cNvSpPr>
+          <p:nvPr>
+            <p:ph type="sldImg" idx="2"/>
+          </p:nvPr>
+        </p:nvSpPr>
+        <p:spPr/>
+      </p:sp>
+      <p:sp>
+        <p:nvSpPr>
+          <p:cNvPr id="3" name="Notes Placeholder 2"/>
+          <p:cNvSpPr>
+            <a:spLocks noGrp="1"/>
+          </p:cNvSpPr>
+          <p:nvPr>
+            <p:ph type="body" idx="3" sz="quarter"/>
+          </p:nvPr>
+        </p:nvSpPr>
+        <p:spPr/>
+        <p:txBody>
+          <a:bodyPr/>
+          <a:lstStyle/>
+          <a:p>
+            <a:r>
+              <a:t>◎ 다음 차시 예고</a:t>
+            </a:r>
+          </a:p>
+          <a:p>
+            <a:r>
+              <a:t>- 다음 시간에는 AI의 답이 늘 옳은지 확인해 봅시다.</a:t>
+            </a:r>
+          </a:p>
+          <a:p/>
+          <a:p>
+            <a:r>
+              <a:t>준비물</a:t>
+            </a:r>
+          </a:p>
+          <a:p>
+            <a:r>
+              <a:t>★ 배움 공책</a:t>
+            </a:r>
+          </a:p>
+          <a:p>
+            <a:r>
+              <a:t>△ 사람의 판단 역할에 초점</a:t>
+            </a:r>
+          </a:p>
+        </p:txBody>
+      </p:sp>
+      <p:sp>
+        <p:nvSpPr>
+          <p:cNvPr id="4" name="Slide Number Placeholder 3"/>
+          <p:cNvSpPr>
+            <a:spLocks noGrp="1"/>
+          </p:cNvSpPr>
+          <p:nvPr>
+            <p:ph type="sldNum" idx="5" sz="quarter"/>
+          </p:nvPr>
+        </p:nvSpPr>
+        <p:spPr/>
+      </p:sp>
+    </p:spTree>
+  </p:cSld>
+  <p:clrMapOvr>
+    <a:masterClrMapping/>
+  </p:clrMapOvr>
+</p:notes>
+</file>
+
+<file path=ppt/notesSlides/notesSlide16.xml><?xml version="1.0" encoding="utf-8"?>
+<p:notes xmlns:a="http://schemas.openxmlformats.org/drawingml/2006/main" xmlns:p="http://schemas.openxmlformats.org/presentationml/2006/main" xmlns:r="http://schemas.openxmlformats.org/officeDocument/2006/relationships">
+  <p:cSld>
+    <p:spTree>
+      <p:nvGrpSpPr>
+        <p:cNvPr id="1" name=""/>
+        <p:cNvGrpSpPr/>
+        <p:nvPr/>
+      </p:nvGrpSpPr>
+      <p:grpSpPr>
+        <a:xfrm>
+          <a:off x="0" y="0"/>
+          <a:ext cx="0" cy="0"/>
+          <a:chOff x="0" y="0"/>
+          <a:chExt cx="0" cy="0"/>
+        </a:xfrm>
+      </p:grpSpPr>
+      <p:sp>
+        <p:nvSpPr>
+          <p:cNvPr id="2" name="Slide Image Placeholder 1"/>
+          <p:cNvSpPr>
+            <a:spLocks noGrp="1"/>
+          </p:cNvSpPr>
+          <p:nvPr>
+            <p:ph type="sldImg" idx="2"/>
+          </p:nvPr>
+        </p:nvSpPr>
+        <p:spPr/>
+      </p:sp>
+      <p:sp>
+        <p:nvSpPr>
+          <p:cNvPr id="3" name="Notes Placeholder 2"/>
+          <p:cNvSpPr>
+            <a:spLocks noGrp="1"/>
+          </p:cNvSpPr>
+          <p:nvPr>
+            <p:ph type="body" idx="3" sz="quarter"/>
+          </p:nvPr>
+        </p:nvSpPr>
+        <p:spPr/>
+        <p:txBody>
+          <a:bodyPr/>
+          <a:lstStyle/>
+          <a:p>
+            <a:r>
               <a:t>오늘 배운 것을 학생이 한 문장으로 말하게 한다.</a:t>
             </a:r>
           </a:p>
@@ -1302,7 +1746,7 @@
           </a:p>
           <a:p>
             <a:r>
-              <a:t>교사 화면 : 모둠별 라벨 수와 실험 기록을 한 화면에서 비교</a:t>
+              <a:t>교사 화면 : 학급 평균 정확도, 데이터를 줄였을 때 평균 정확도, 라벨이 갈린 카드, 배움 문장 모음</a:t>
             </a:r>
           </a:p>
         </p:txBody>
@@ -1372,17 +1816,23 @@
           <a:lstStyle/>
           <a:p>
             <a:r>
-              <a:t>1인 1기기가 아니어도 모두 참여하게 한다.</a:t>
-            </a:r>
-          </a:p>
-          <a:p>
-            <a:r>
-              <a:t>개인정보가 담긴 사진은 쓰지 않는다.</a:t>
-            </a:r>
-          </a:p>
-          <a:p>
-            <a:r>
-              <a:t>정확도 경쟁으로 흐르지 않게 한다.</a:t>
+              <a:t>1단계 · 4분</a:t>
+            </a:r>
+          </a:p>
+          <a:p>
+            <a:r>
+              <a:t>카드 세 장을 보고 학생이 먼저 맞혀 본다. AI를 켜기 전에 사람이 무엇을 보고 판단하는지 말로 꺼낸다.</a:t>
+            </a:r>
+          </a:p>
+          <a:p/>
+          <a:p>
+            <a:r>
+              <a:t>발문 : 여러분은 무엇을 보고 강아지인지 고양이인지 정했나요?</a:t>
+            </a:r>
+          </a:p>
+          <a:p>
+            <a:r>
+              <a:t>예상 답변 : 귀 모양과 몸집을 보고 정했습니다.</a:t>
             </a:r>
           </a:p>
         </p:txBody>
@@ -1452,33 +1902,23 @@
           <a:lstStyle/>
           <a:p>
             <a:r>
-              <a:t>◎ 배움 정리</a:t>
-            </a:r>
-          </a:p>
-          <a:p>
-            <a:r>
-              <a:t>- 오늘 알게 된 점을 한 문장으로 말해 봅시다.</a:t>
-            </a:r>
-          </a:p>
-          <a:p>
-            <a:r>
-              <a:t>  · AI는 사람이 준 데이터로 배우고, 데이터에 따라 결과가 달라집니다.</a:t>
+              <a:t>2단계 · 10분</a:t>
+            </a:r>
+          </a:p>
+          <a:p>
+            <a:r>
+              <a:t>특징만 그려진 카드 20장에 강아지 또는 고양이 이름표를 붙인다. 이것이 학습 데이터가 된다.</a:t>
             </a:r>
           </a:p>
           <a:p/>
           <a:p>
             <a:r>
-              <a:t>준비물</a:t>
-            </a:r>
-          </a:p>
-          <a:p>
-            <a:r>
-              <a:t>★ 배움 공책</a:t>
-            </a:r>
-          </a:p>
-          <a:p>
-            <a:r>
-              <a:t>△ 사람의 판단 역할에 초점</a:t>
+              <a:t>발문 : 이 카드 더미를 무엇이라고 부를까요?</a:t>
+            </a:r>
+          </a:p>
+          <a:p>
+            <a:r>
+              <a:t>예상 답변 : AI를 가르치는 학습 데이터입니다.</a:t>
             </a:r>
           </a:p>
         </p:txBody>
@@ -4748,14 +5188,97 @@
       </p:sp>
       <p:sp>
         <p:nvSpPr>
-          <p:cNvPr id="3" name="TextBox 2"/>
+          <p:cNvPr id="3" name="Rectangle 2"/>
+          <p:cNvSpPr/>
+          <p:nvPr/>
+        </p:nvSpPr>
+        <p:spPr>
+          <a:xfrm>
+            <a:off x="10088575" y="640080"/>
+            <a:ext cx="1280160" cy="502920"/>
+          </a:xfrm>
+          <a:prstGeom prst="rect">
+            <a:avLst/>
+          </a:prstGeom>
+          <a:solidFill>
+            <a:srgbClr val="2563EB"/>
+          </a:solidFill>
+          <a:ln>
+            <a:noFill/>
+          </a:ln>
+          <a:effectLst/>
+        </p:spPr>
+        <p:style>
+          <a:lnRef idx="1">
+            <a:schemeClr val="accent1"/>
+          </a:lnRef>
+          <a:fillRef idx="3">
+            <a:schemeClr val="accent1"/>
+          </a:fillRef>
+          <a:effectRef idx="2">
+            <a:schemeClr val="accent1"/>
+          </a:effectRef>
+          <a:fontRef idx="minor">
+            <a:schemeClr val="lt1"/>
+          </a:fontRef>
+        </p:style>
+        <p:txBody>
+          <a:bodyPr rtlCol="0" anchor="ctr"/>
+          <a:lstStyle/>
+          <a:p>
+            <a:pPr algn="ctr"/>
+          </a:p>
+        </p:txBody>
+      </p:sp>
+      <p:sp>
+        <p:nvSpPr>
+          <p:cNvPr id="4" name="TextBox 3"/>
           <p:cNvSpPr txBox="1"/>
           <p:nvPr/>
         </p:nvSpPr>
         <p:spPr>
           <a:xfrm>
+            <a:off x="10088575" y="658368"/>
+            <a:ext cx="1280160" cy="457200"/>
+          </a:xfrm>
+          <a:prstGeom prst="rect">
+            <a:avLst/>
+          </a:prstGeom>
+          <a:noFill/>
+        </p:spPr>
+        <p:txBody>
+          <a:bodyPr wrap="square" anchor="t">
+            <a:spAutoFit/>
+          </a:bodyPr>
+          <a:lstStyle/>
+          <a:p>
+            <a:pPr algn="ctr">
+              <a:lnSpc>
+                <a:spcPct val="125000"/>
+              </a:lnSpc>
+            </a:pPr>
+            <a:r>
+              <a:rPr sz="2000" b="1">
+                <a:solidFill>
+                  <a:srgbClr val="FFFFFF"/>
+                </a:solidFill>
+                <a:latin typeface="맑은 고딕"/>
+              </a:rPr>
+              <a:t>11분</a:t>
+            </a:r>
+          </a:p>
+        </p:txBody>
+      </p:sp>
+      <p:sp>
+        <p:nvSpPr>
+          <p:cNvPr id="5" name="TextBox 4"/>
+          <p:cNvSpPr txBox="1"/>
+          <p:nvPr/>
+        </p:nvSpPr>
+        <p:spPr>
+          <a:xfrm>
             <a:off x="822960" y="731520"/>
-            <a:ext cx="10545775" cy="548640"/>
+            <a:ext cx="8351215" cy="457200"/>
           </a:xfrm>
           <a:prstGeom prst="rect">
             <a:avLst/>
@@ -4774,27 +5297,27 @@
               </a:lnSpc>
             </a:pPr>
             <a:r>
-              <a:rPr sz="2000" b="1">
+              <a:rPr sz="1800" b="1">
                 <a:solidFill>
                   <a:srgbClr val="2563EB"/>
                 </a:solidFill>
                 <a:latin typeface="맑은 고딕"/>
               </a:rPr>
-              <a:t>정리 · 다음 차시 예고</a:t>
-            </a:r>
-          </a:p>
-        </p:txBody>
-      </p:sp>
-      <p:sp>
-        <p:nvSpPr>
-          <p:cNvPr id="4" name="TextBox 3"/>
+              <a:t>3단계</a:t>
+            </a:r>
+          </a:p>
+        </p:txBody>
+      </p:sp>
+      <p:sp>
+        <p:nvSpPr>
+          <p:cNvPr id="6" name="TextBox 5"/>
           <p:cNvSpPr txBox="1"/>
           <p:nvPr/>
         </p:nvSpPr>
         <p:spPr>
           <a:xfrm>
-            <a:off x="822960" y="1828800"/>
-            <a:ext cx="10545775" cy="3291840"/>
+            <a:off x="822960" y="1371600"/>
+            <a:ext cx="10545775" cy="822960"/>
           </a:xfrm>
           <a:prstGeom prst="rect">
             <a:avLst/>
@@ -4809,17 +5332,95 @@
           <a:p>
             <a:pPr algn="l">
               <a:lnSpc>
-                <a:spcPct val="160000"/>
+                <a:spcPct val="125000"/>
               </a:lnSpc>
             </a:pPr>
             <a:r>
-              <a:rPr sz="2800" b="0">
+              <a:rPr sz="3600" b="1">
                 <a:solidFill>
                   <a:srgbClr val="1F2937"/>
                 </a:solidFill>
                 <a:latin typeface="맑은 고딕"/>
               </a:rPr>
-              <a:t>다음 시간에는 AI의 답이 늘 옳은지 확인해 봅시다.</a:t>
+              <a:t>학습시키고 시험 보기</a:t>
+            </a:r>
+          </a:p>
+        </p:txBody>
+      </p:sp>
+      <p:sp>
+        <p:nvSpPr>
+          <p:cNvPr id="7" name="TextBox 6"/>
+          <p:cNvSpPr txBox="1"/>
+          <p:nvPr/>
+        </p:nvSpPr>
+        <p:spPr>
+          <a:xfrm>
+            <a:off x="822960" y="2468880"/>
+            <a:ext cx="10545775" cy="1463040"/>
+          </a:xfrm>
+          <a:prstGeom prst="rect">
+            <a:avLst/>
+          </a:prstGeom>
+          <a:noFill/>
+        </p:spPr>
+        <p:txBody>
+          <a:bodyPr wrap="square" anchor="t">
+            <a:spAutoFit/>
+          </a:bodyPr>
+          <a:lstStyle/>
+          <a:p>
+            <a:pPr algn="l">
+              <a:lnSpc>
+                <a:spcPct val="150000"/>
+              </a:lnSpc>
+            </a:pPr>
+            <a:r>
+              <a:rPr sz="2000" b="0">
+                <a:solidFill>
+                  <a:srgbClr val="6B7280"/>
+                </a:solidFill>
+                <a:latin typeface="맑은 고딕"/>
+              </a:rPr>
+              <a:t>학습 버튼을 누르면 브라우저 안에서 진짜 모델이 학습한다. 시험 카드 여섯 장으로 정확도를 재고, 모델이 어떤 특징을 근거로 삼았는지 막대로 확인한다.</a:t>
+            </a:r>
+          </a:p>
+        </p:txBody>
+      </p:sp>
+      <p:sp>
+        <p:nvSpPr>
+          <p:cNvPr id="8" name="TextBox 7"/>
+          <p:cNvSpPr txBox="1"/>
+          <p:nvPr/>
+        </p:nvSpPr>
+        <p:spPr>
+          <a:xfrm>
+            <a:off x="822960" y="4114800"/>
+            <a:ext cx="10545775" cy="1097280"/>
+          </a:xfrm>
+          <a:prstGeom prst="rect">
+            <a:avLst/>
+          </a:prstGeom>
+          <a:noFill/>
+        </p:spPr>
+        <p:txBody>
+          <a:bodyPr wrap="square" anchor="t">
+            <a:spAutoFit/>
+          </a:bodyPr>
+          <a:lstStyle/>
+          <a:p>
+            <a:pPr algn="l">
+              <a:lnSpc>
+                <a:spcPct val="125000"/>
+              </a:lnSpc>
+            </a:pPr>
+            <a:r>
+              <a:rPr sz="2600" b="1">
+                <a:solidFill>
+                  <a:srgbClr val="1F2937"/>
+                </a:solidFill>
+                <a:latin typeface="맑은 고딕"/>
+              </a:rPr>
+              <a:t>AI는 무엇을 보고 판단했나요?</a:t>
             </a:r>
           </a:p>
         </p:txBody>
@@ -4888,6 +5489,1028 @@
       </p:sp>
       <p:sp>
         <p:nvSpPr>
+          <p:cNvPr id="3" name="Rectangle 2"/>
+          <p:cNvSpPr/>
+          <p:nvPr/>
+        </p:nvSpPr>
+        <p:spPr>
+          <a:xfrm>
+            <a:off x="10088575" y="640080"/>
+            <a:ext cx="1280160" cy="502920"/>
+          </a:xfrm>
+          <a:prstGeom prst="rect">
+            <a:avLst/>
+          </a:prstGeom>
+          <a:solidFill>
+            <a:srgbClr val="2563EB"/>
+          </a:solidFill>
+          <a:ln>
+            <a:noFill/>
+          </a:ln>
+          <a:effectLst/>
+        </p:spPr>
+        <p:style>
+          <a:lnRef idx="1">
+            <a:schemeClr val="accent1"/>
+          </a:lnRef>
+          <a:fillRef idx="3">
+            <a:schemeClr val="accent1"/>
+          </a:fillRef>
+          <a:effectRef idx="2">
+            <a:schemeClr val="accent1"/>
+          </a:effectRef>
+          <a:fontRef idx="minor">
+            <a:schemeClr val="lt1"/>
+          </a:fontRef>
+        </p:style>
+        <p:txBody>
+          <a:bodyPr rtlCol="0" anchor="ctr"/>
+          <a:lstStyle/>
+          <a:p>
+            <a:pPr algn="ctr"/>
+          </a:p>
+        </p:txBody>
+      </p:sp>
+      <p:sp>
+        <p:nvSpPr>
+          <p:cNvPr id="4" name="TextBox 3"/>
+          <p:cNvSpPr txBox="1"/>
+          <p:nvPr/>
+        </p:nvSpPr>
+        <p:spPr>
+          <a:xfrm>
+            <a:off x="10088575" y="658368"/>
+            <a:ext cx="1280160" cy="457200"/>
+          </a:xfrm>
+          <a:prstGeom prst="rect">
+            <a:avLst/>
+          </a:prstGeom>
+          <a:noFill/>
+        </p:spPr>
+        <p:txBody>
+          <a:bodyPr wrap="square" anchor="t">
+            <a:spAutoFit/>
+          </a:bodyPr>
+          <a:lstStyle/>
+          <a:p>
+            <a:pPr algn="ctr">
+              <a:lnSpc>
+                <a:spcPct val="125000"/>
+              </a:lnSpc>
+            </a:pPr>
+            <a:r>
+              <a:rPr sz="2000" b="1">
+                <a:solidFill>
+                  <a:srgbClr val="FFFFFF"/>
+                </a:solidFill>
+                <a:latin typeface="맑은 고딕"/>
+              </a:rPr>
+              <a:t>10분</a:t>
+            </a:r>
+          </a:p>
+        </p:txBody>
+      </p:sp>
+      <p:sp>
+        <p:nvSpPr>
+          <p:cNvPr id="5" name="TextBox 4"/>
+          <p:cNvSpPr txBox="1"/>
+          <p:nvPr/>
+        </p:nvSpPr>
+        <p:spPr>
+          <a:xfrm>
+            <a:off x="822960" y="731520"/>
+            <a:ext cx="8351215" cy="457200"/>
+          </a:xfrm>
+          <a:prstGeom prst="rect">
+            <a:avLst/>
+          </a:prstGeom>
+          <a:noFill/>
+        </p:spPr>
+        <p:txBody>
+          <a:bodyPr wrap="square" anchor="t">
+            <a:spAutoFit/>
+          </a:bodyPr>
+          <a:lstStyle/>
+          <a:p>
+            <a:pPr algn="l">
+              <a:lnSpc>
+                <a:spcPct val="125000"/>
+              </a:lnSpc>
+            </a:pPr>
+            <a:r>
+              <a:rPr sz="1800" b="1">
+                <a:solidFill>
+                  <a:srgbClr val="2563EB"/>
+                </a:solidFill>
+                <a:latin typeface="맑은 고딕"/>
+              </a:rPr>
+              <a:t>4단계</a:t>
+            </a:r>
+          </a:p>
+        </p:txBody>
+      </p:sp>
+      <p:sp>
+        <p:nvSpPr>
+          <p:cNvPr id="6" name="TextBox 5"/>
+          <p:cNvSpPr txBox="1"/>
+          <p:nvPr/>
+        </p:nvSpPr>
+        <p:spPr>
+          <a:xfrm>
+            <a:off x="822960" y="1371600"/>
+            <a:ext cx="10545775" cy="822960"/>
+          </a:xfrm>
+          <a:prstGeom prst="rect">
+            <a:avLst/>
+          </a:prstGeom>
+          <a:noFill/>
+        </p:spPr>
+        <p:txBody>
+          <a:bodyPr wrap="square" anchor="t">
+            <a:spAutoFit/>
+          </a:bodyPr>
+          <a:lstStyle/>
+          <a:p>
+            <a:pPr algn="l">
+              <a:lnSpc>
+                <a:spcPct val="125000"/>
+              </a:lnSpc>
+            </a:pPr>
+            <a:r>
+              <a:rPr sz="3600" b="1">
+                <a:solidFill>
+                  <a:srgbClr val="1F2937"/>
+                </a:solidFill>
+                <a:latin typeface="맑은 고딕"/>
+              </a:rPr>
+              <a:t>한쪽 데이터를 줄이면</a:t>
+            </a:r>
+          </a:p>
+        </p:txBody>
+      </p:sp>
+      <p:sp>
+        <p:nvSpPr>
+          <p:cNvPr id="7" name="TextBox 6"/>
+          <p:cNvSpPr txBox="1"/>
+          <p:nvPr/>
+        </p:nvSpPr>
+        <p:spPr>
+          <a:xfrm>
+            <a:off x="822960" y="2468880"/>
+            <a:ext cx="10545775" cy="1463040"/>
+          </a:xfrm>
+          <a:prstGeom prst="rect">
+            <a:avLst/>
+          </a:prstGeom>
+          <a:noFill/>
+        </p:spPr>
+        <p:txBody>
+          <a:bodyPr wrap="square" anchor="t">
+            <a:spAutoFit/>
+          </a:bodyPr>
+          <a:lstStyle/>
+          <a:p>
+            <a:pPr algn="l">
+              <a:lnSpc>
+                <a:spcPct val="150000"/>
+              </a:lnSpc>
+            </a:pPr>
+            <a:r>
+              <a:rPr sz="2000" b="0">
+                <a:solidFill>
+                  <a:srgbClr val="6B7280"/>
+                </a:solidFill>
+                <a:latin typeface="맑은 고딕"/>
+              </a:rPr>
+              <a:t>고양이 카드를 줄여 다시 학습시킨다. 정확도가 떨어지고 어떤 시험 카드가 틀리게 바뀌는지 표시된다.</a:t>
+            </a:r>
+          </a:p>
+        </p:txBody>
+      </p:sp>
+      <p:sp>
+        <p:nvSpPr>
+          <p:cNvPr id="8" name="TextBox 7"/>
+          <p:cNvSpPr txBox="1"/>
+          <p:nvPr/>
+        </p:nvSpPr>
+        <p:spPr>
+          <a:xfrm>
+            <a:off x="822960" y="4114800"/>
+            <a:ext cx="10545775" cy="1097280"/>
+          </a:xfrm>
+          <a:prstGeom prst="rect">
+            <a:avLst/>
+          </a:prstGeom>
+          <a:noFill/>
+        </p:spPr>
+        <p:txBody>
+          <a:bodyPr wrap="square" anchor="t">
+            <a:spAutoFit/>
+          </a:bodyPr>
+          <a:lstStyle/>
+          <a:p>
+            <a:pPr algn="l">
+              <a:lnSpc>
+                <a:spcPct val="125000"/>
+              </a:lnSpc>
+            </a:pPr>
+            <a:r>
+              <a:rPr sz="2600" b="1">
+                <a:solidFill>
+                  <a:srgbClr val="1F2937"/>
+                </a:solidFill>
+                <a:latin typeface="맑은 고딕"/>
+              </a:rPr>
+              <a:t>왜 고양이를 자주 틀리게 되었을까요?</a:t>
+            </a:r>
+          </a:p>
+        </p:txBody>
+      </p:sp>
+    </p:spTree>
+  </p:cSld>
+  <p:clrMapOvr>
+    <a:masterClrMapping/>
+  </p:clrMapOvr>
+</p:sld>
+</file>
+
+<file path=ppt/slides/slide12.xml><?xml version="1.0" encoding="utf-8"?>
+<p:sld xmlns:a="http://schemas.openxmlformats.org/drawingml/2006/main" xmlns:p="http://schemas.openxmlformats.org/presentationml/2006/main" xmlns:r="http://schemas.openxmlformats.org/officeDocument/2006/relationships">
+  <p:cSld>
+    <p:spTree>
+      <p:nvGrpSpPr>
+        <p:cNvPr id="1" name=""/>
+        <p:cNvGrpSpPr/>
+        <p:nvPr/>
+      </p:nvGrpSpPr>
+      <p:grpSpPr/>
+      <p:sp>
+        <p:nvSpPr>
+          <p:cNvPr id="2" name="Rectangle 1"/>
+          <p:cNvSpPr/>
+          <p:nvPr/>
+        </p:nvSpPr>
+        <p:spPr>
+          <a:xfrm>
+            <a:off x="0" y="0"/>
+            <a:ext cx="201168" cy="6858000"/>
+          </a:xfrm>
+          <a:prstGeom prst="rect">
+            <a:avLst/>
+          </a:prstGeom>
+          <a:solidFill>
+            <a:srgbClr val="2563EB"/>
+          </a:solidFill>
+          <a:ln>
+            <a:noFill/>
+          </a:ln>
+          <a:effectLst/>
+        </p:spPr>
+        <p:style>
+          <a:lnRef idx="1">
+            <a:schemeClr val="accent1"/>
+          </a:lnRef>
+          <a:fillRef idx="3">
+            <a:schemeClr val="accent1"/>
+          </a:fillRef>
+          <a:effectRef idx="2">
+            <a:schemeClr val="accent1"/>
+          </a:effectRef>
+          <a:fontRef idx="minor">
+            <a:schemeClr val="lt1"/>
+          </a:fontRef>
+        </p:style>
+        <p:txBody>
+          <a:bodyPr rtlCol="0" anchor="ctr"/>
+          <a:lstStyle/>
+          <a:p>
+            <a:pPr algn="ctr"/>
+          </a:p>
+        </p:txBody>
+      </p:sp>
+      <p:sp>
+        <p:nvSpPr>
+          <p:cNvPr id="3" name="Rectangle 2"/>
+          <p:cNvSpPr/>
+          <p:nvPr/>
+        </p:nvSpPr>
+        <p:spPr>
+          <a:xfrm>
+            <a:off x="10088575" y="640080"/>
+            <a:ext cx="1280160" cy="502920"/>
+          </a:xfrm>
+          <a:prstGeom prst="rect">
+            <a:avLst/>
+          </a:prstGeom>
+          <a:solidFill>
+            <a:srgbClr val="2563EB"/>
+          </a:solidFill>
+          <a:ln>
+            <a:noFill/>
+          </a:ln>
+          <a:effectLst/>
+        </p:spPr>
+        <p:style>
+          <a:lnRef idx="1">
+            <a:schemeClr val="accent1"/>
+          </a:lnRef>
+          <a:fillRef idx="3">
+            <a:schemeClr val="accent1"/>
+          </a:fillRef>
+          <a:effectRef idx="2">
+            <a:schemeClr val="accent1"/>
+          </a:effectRef>
+          <a:fontRef idx="minor">
+            <a:schemeClr val="lt1"/>
+          </a:fontRef>
+        </p:style>
+        <p:txBody>
+          <a:bodyPr rtlCol="0" anchor="ctr"/>
+          <a:lstStyle/>
+          <a:p>
+            <a:pPr algn="ctr"/>
+          </a:p>
+        </p:txBody>
+      </p:sp>
+      <p:sp>
+        <p:nvSpPr>
+          <p:cNvPr id="4" name="TextBox 3"/>
+          <p:cNvSpPr txBox="1"/>
+          <p:nvPr/>
+        </p:nvSpPr>
+        <p:spPr>
+          <a:xfrm>
+            <a:off x="10088575" y="658368"/>
+            <a:ext cx="1280160" cy="457200"/>
+          </a:xfrm>
+          <a:prstGeom prst="rect">
+            <a:avLst/>
+          </a:prstGeom>
+          <a:noFill/>
+        </p:spPr>
+        <p:txBody>
+          <a:bodyPr wrap="square" anchor="t">
+            <a:spAutoFit/>
+          </a:bodyPr>
+          <a:lstStyle/>
+          <a:p>
+            <a:pPr algn="ctr">
+              <a:lnSpc>
+                <a:spcPct val="125000"/>
+              </a:lnSpc>
+            </a:pPr>
+            <a:r>
+              <a:rPr sz="2000" b="1">
+                <a:solidFill>
+                  <a:srgbClr val="FFFFFF"/>
+                </a:solidFill>
+                <a:latin typeface="맑은 고딕"/>
+              </a:rPr>
+              <a:t>5분</a:t>
+            </a:r>
+          </a:p>
+        </p:txBody>
+      </p:sp>
+      <p:sp>
+        <p:nvSpPr>
+          <p:cNvPr id="5" name="TextBox 4"/>
+          <p:cNvSpPr txBox="1"/>
+          <p:nvPr/>
+        </p:nvSpPr>
+        <p:spPr>
+          <a:xfrm>
+            <a:off x="822960" y="731520"/>
+            <a:ext cx="8351215" cy="457200"/>
+          </a:xfrm>
+          <a:prstGeom prst="rect">
+            <a:avLst/>
+          </a:prstGeom>
+          <a:noFill/>
+        </p:spPr>
+        <p:txBody>
+          <a:bodyPr wrap="square" anchor="t">
+            <a:spAutoFit/>
+          </a:bodyPr>
+          <a:lstStyle/>
+          <a:p>
+            <a:pPr algn="l">
+              <a:lnSpc>
+                <a:spcPct val="125000"/>
+              </a:lnSpc>
+            </a:pPr>
+            <a:r>
+              <a:rPr sz="1800" b="1">
+                <a:solidFill>
+                  <a:srgbClr val="2563EB"/>
+                </a:solidFill>
+                <a:latin typeface="맑은 고딕"/>
+              </a:rPr>
+              <a:t>5단계</a:t>
+            </a:r>
+          </a:p>
+        </p:txBody>
+      </p:sp>
+      <p:sp>
+        <p:nvSpPr>
+          <p:cNvPr id="6" name="TextBox 5"/>
+          <p:cNvSpPr txBox="1"/>
+          <p:nvPr/>
+        </p:nvSpPr>
+        <p:spPr>
+          <a:xfrm>
+            <a:off x="822960" y="1371600"/>
+            <a:ext cx="10545775" cy="822960"/>
+          </a:xfrm>
+          <a:prstGeom prst="rect">
+            <a:avLst/>
+          </a:prstGeom>
+          <a:noFill/>
+        </p:spPr>
+        <p:txBody>
+          <a:bodyPr wrap="square" anchor="t">
+            <a:spAutoFit/>
+          </a:bodyPr>
+          <a:lstStyle/>
+          <a:p>
+            <a:pPr algn="l">
+              <a:lnSpc>
+                <a:spcPct val="125000"/>
+              </a:lnSpc>
+            </a:pPr>
+            <a:r>
+              <a:rPr sz="3600" b="1">
+                <a:solidFill>
+                  <a:srgbClr val="1F2937"/>
+                </a:solidFill>
+                <a:latin typeface="맑은 고딕"/>
+              </a:rPr>
+              <a:t>사람이 한 일과 AI가 한 일</a:t>
+            </a:r>
+          </a:p>
+        </p:txBody>
+      </p:sp>
+      <p:sp>
+        <p:nvSpPr>
+          <p:cNvPr id="7" name="TextBox 6"/>
+          <p:cNvSpPr txBox="1"/>
+          <p:nvPr/>
+        </p:nvSpPr>
+        <p:spPr>
+          <a:xfrm>
+            <a:off x="822960" y="2468880"/>
+            <a:ext cx="10545775" cy="1463040"/>
+          </a:xfrm>
+          <a:prstGeom prst="rect">
+            <a:avLst/>
+          </a:prstGeom>
+          <a:noFill/>
+        </p:spPr>
+        <p:txBody>
+          <a:bodyPr wrap="square" anchor="t">
+            <a:spAutoFit/>
+          </a:bodyPr>
+          <a:lstStyle/>
+          <a:p>
+            <a:pPr algn="l">
+              <a:lnSpc>
+                <a:spcPct val="150000"/>
+              </a:lnSpc>
+            </a:pPr>
+            <a:r>
+              <a:rPr sz="2000" b="0">
+                <a:solidFill>
+                  <a:srgbClr val="6B7280"/>
+                </a:solidFill>
+                <a:latin typeface="맑은 고딕"/>
+              </a:rPr>
+              <a:t>수업에서 있었던 일 열 가지를 사람 칸과 AI 칸으로 나눈다.</a:t>
+            </a:r>
+          </a:p>
+        </p:txBody>
+      </p:sp>
+      <p:sp>
+        <p:nvSpPr>
+          <p:cNvPr id="8" name="TextBox 7"/>
+          <p:cNvSpPr txBox="1"/>
+          <p:nvPr/>
+        </p:nvSpPr>
+        <p:spPr>
+          <a:xfrm>
+            <a:off x="822960" y="4114800"/>
+            <a:ext cx="10545775" cy="1097280"/>
+          </a:xfrm>
+          <a:prstGeom prst="rect">
+            <a:avLst/>
+          </a:prstGeom>
+          <a:noFill/>
+        </p:spPr>
+        <p:txBody>
+          <a:bodyPr wrap="square" anchor="t">
+            <a:spAutoFit/>
+          </a:bodyPr>
+          <a:lstStyle/>
+          <a:p>
+            <a:pPr algn="l">
+              <a:lnSpc>
+                <a:spcPct val="125000"/>
+              </a:lnSpc>
+            </a:pPr>
+            <a:r>
+              <a:rPr sz="2600" b="1">
+                <a:solidFill>
+                  <a:srgbClr val="1F2937"/>
+                </a:solidFill>
+                <a:latin typeface="맑은 고딕"/>
+              </a:rPr>
+              <a:t>AI를 똑똑하게 만든 것은 누구일까요?</a:t>
+            </a:r>
+          </a:p>
+        </p:txBody>
+      </p:sp>
+    </p:spTree>
+  </p:cSld>
+  <p:clrMapOvr>
+    <a:masterClrMapping/>
+  </p:clrMapOvr>
+</p:sld>
+</file>
+
+<file path=ppt/slides/slide13.xml><?xml version="1.0" encoding="utf-8"?>
+<p:sld xmlns:a="http://schemas.openxmlformats.org/drawingml/2006/main" xmlns:p="http://schemas.openxmlformats.org/presentationml/2006/main" xmlns:r="http://schemas.openxmlformats.org/officeDocument/2006/relationships">
+  <p:cSld>
+    <p:spTree>
+      <p:nvGrpSpPr>
+        <p:cNvPr id="1" name=""/>
+        <p:cNvGrpSpPr/>
+        <p:nvPr/>
+      </p:nvGrpSpPr>
+      <p:grpSpPr/>
+      <p:sp>
+        <p:nvSpPr>
+          <p:cNvPr id="2" name="Rectangle 1"/>
+          <p:cNvSpPr/>
+          <p:nvPr/>
+        </p:nvSpPr>
+        <p:spPr>
+          <a:xfrm>
+            <a:off x="0" y="2103120"/>
+            <a:ext cx="12191695" cy="2377440"/>
+          </a:xfrm>
+          <a:prstGeom prst="rect">
+            <a:avLst/>
+          </a:prstGeom>
+          <a:solidFill>
+            <a:srgbClr val="F3F4F6"/>
+          </a:solidFill>
+          <a:ln>
+            <a:noFill/>
+          </a:ln>
+          <a:effectLst/>
+        </p:spPr>
+        <p:style>
+          <a:lnRef idx="1">
+            <a:schemeClr val="accent1"/>
+          </a:lnRef>
+          <a:fillRef idx="3">
+            <a:schemeClr val="accent1"/>
+          </a:fillRef>
+          <a:effectRef idx="2">
+            <a:schemeClr val="accent1"/>
+          </a:effectRef>
+          <a:fontRef idx="minor">
+            <a:schemeClr val="lt1"/>
+          </a:fontRef>
+        </p:style>
+        <p:txBody>
+          <a:bodyPr rtlCol="0" anchor="ctr"/>
+          <a:lstStyle/>
+          <a:p>
+            <a:pPr algn="ctr"/>
+          </a:p>
+        </p:txBody>
+      </p:sp>
+      <p:sp>
+        <p:nvSpPr>
+          <p:cNvPr id="3" name="TextBox 2"/>
+          <p:cNvSpPr txBox="1"/>
+          <p:nvPr/>
+        </p:nvSpPr>
+        <p:spPr>
+          <a:xfrm>
+            <a:off x="822960" y="1280160"/>
+            <a:ext cx="10545775" cy="548640"/>
+          </a:xfrm>
+          <a:prstGeom prst="rect">
+            <a:avLst/>
+          </a:prstGeom>
+          <a:noFill/>
+        </p:spPr>
+        <p:txBody>
+          <a:bodyPr wrap="square" anchor="t">
+            <a:spAutoFit/>
+          </a:bodyPr>
+          <a:lstStyle/>
+          <a:p>
+            <a:pPr algn="l">
+              <a:lnSpc>
+                <a:spcPct val="125000"/>
+              </a:lnSpc>
+            </a:pPr>
+            <a:r>
+              <a:rPr sz="2000" b="1">
+                <a:solidFill>
+                  <a:srgbClr val="2563EB"/>
+                </a:solidFill>
+                <a:latin typeface="맑은 고딕"/>
+              </a:rPr>
+              <a:t>기기가 없어도 함께합니다</a:t>
+            </a:r>
+          </a:p>
+        </p:txBody>
+      </p:sp>
+      <p:sp>
+        <p:nvSpPr>
+          <p:cNvPr id="4" name="TextBox 3"/>
+          <p:cNvSpPr txBox="1"/>
+          <p:nvPr/>
+        </p:nvSpPr>
+        <p:spPr>
+          <a:xfrm>
+            <a:off x="822960" y="2560320"/>
+            <a:ext cx="10545775" cy="1645920"/>
+          </a:xfrm>
+          <a:prstGeom prst="rect">
+            <a:avLst/>
+          </a:prstGeom>
+          <a:noFill/>
+        </p:spPr>
+        <p:txBody>
+          <a:bodyPr wrap="square" anchor="t">
+            <a:spAutoFit/>
+          </a:bodyPr>
+          <a:lstStyle/>
+          <a:p>
+            <a:pPr algn="l">
+              <a:lnSpc>
+                <a:spcPct val="125000"/>
+              </a:lnSpc>
+            </a:pPr>
+            <a:r>
+              <a:rPr sz="2400" b="0">
+                <a:solidFill>
+                  <a:srgbClr val="1F2937"/>
+                </a:solidFill>
+                <a:latin typeface="맑은 고딕"/>
+              </a:rPr>
+              <a:t>기기가 부족하면 교사 화면 하나로 함께 진행한다. 인쇄한 카드 20장에 모둠이 이름표를 붙이고, 교사가 앞에서 학습과 시험을 눌러 결과를 함께 본다.</a:t>
+            </a:r>
+          </a:p>
+        </p:txBody>
+      </p:sp>
+    </p:spTree>
+  </p:cSld>
+  <p:clrMapOvr>
+    <a:masterClrMapping/>
+  </p:clrMapOvr>
+</p:sld>
+</file>
+
+<file path=ppt/slides/slide14.xml><?xml version="1.0" encoding="utf-8"?>
+<p:sld xmlns:a="http://schemas.openxmlformats.org/drawingml/2006/main" xmlns:p="http://schemas.openxmlformats.org/presentationml/2006/main" xmlns:r="http://schemas.openxmlformats.org/officeDocument/2006/relationships">
+  <p:cSld>
+    <p:spTree>
+      <p:nvGrpSpPr>
+        <p:cNvPr id="1" name=""/>
+        <p:cNvGrpSpPr/>
+        <p:nvPr/>
+      </p:nvGrpSpPr>
+      <p:grpSpPr/>
+      <p:sp>
+        <p:nvSpPr>
+          <p:cNvPr id="2" name="Rectangle 1"/>
+          <p:cNvSpPr/>
+          <p:nvPr/>
+        </p:nvSpPr>
+        <p:spPr>
+          <a:xfrm>
+            <a:off x="0" y="0"/>
+            <a:ext cx="201168" cy="6858000"/>
+          </a:xfrm>
+          <a:prstGeom prst="rect">
+            <a:avLst/>
+          </a:prstGeom>
+          <a:solidFill>
+            <a:srgbClr val="2563EB"/>
+          </a:solidFill>
+          <a:ln>
+            <a:noFill/>
+          </a:ln>
+          <a:effectLst/>
+        </p:spPr>
+        <p:style>
+          <a:lnRef idx="1">
+            <a:schemeClr val="accent1"/>
+          </a:lnRef>
+          <a:fillRef idx="3">
+            <a:schemeClr val="accent1"/>
+          </a:fillRef>
+          <a:effectRef idx="2">
+            <a:schemeClr val="accent1"/>
+          </a:effectRef>
+          <a:fontRef idx="minor">
+            <a:schemeClr val="lt1"/>
+          </a:fontRef>
+        </p:style>
+        <p:txBody>
+          <a:bodyPr rtlCol="0" anchor="ctr"/>
+          <a:lstStyle/>
+          <a:p>
+            <a:pPr algn="ctr"/>
+          </a:p>
+        </p:txBody>
+      </p:sp>
+      <p:sp>
+        <p:nvSpPr>
+          <p:cNvPr id="3" name="TextBox 2"/>
+          <p:cNvSpPr txBox="1"/>
+          <p:nvPr/>
+        </p:nvSpPr>
+        <p:spPr>
+          <a:xfrm>
+            <a:off x="822960" y="731520"/>
+            <a:ext cx="10545775" cy="548640"/>
+          </a:xfrm>
+          <a:prstGeom prst="rect">
+            <a:avLst/>
+          </a:prstGeom>
+          <a:noFill/>
+        </p:spPr>
+        <p:txBody>
+          <a:bodyPr wrap="square" anchor="t">
+            <a:spAutoFit/>
+          </a:bodyPr>
+          <a:lstStyle/>
+          <a:p>
+            <a:pPr algn="l">
+              <a:lnSpc>
+                <a:spcPct val="125000"/>
+              </a:lnSpc>
+            </a:pPr>
+            <a:r>
+              <a:rPr sz="2000" b="1">
+                <a:solidFill>
+                  <a:srgbClr val="2563EB"/>
+                </a:solidFill>
+                <a:latin typeface="맑은 고딕"/>
+              </a:rPr>
+              <a:t>정리 · 배움 정리</a:t>
+            </a:r>
+          </a:p>
+        </p:txBody>
+      </p:sp>
+      <p:sp>
+        <p:nvSpPr>
+          <p:cNvPr id="4" name="TextBox 3"/>
+          <p:cNvSpPr txBox="1"/>
+          <p:nvPr/>
+        </p:nvSpPr>
+        <p:spPr>
+          <a:xfrm>
+            <a:off x="822960" y="1828800"/>
+            <a:ext cx="10545775" cy="3291840"/>
+          </a:xfrm>
+          <a:prstGeom prst="rect">
+            <a:avLst/>
+          </a:prstGeom>
+          <a:noFill/>
+        </p:spPr>
+        <p:txBody>
+          <a:bodyPr wrap="square" anchor="t">
+            <a:spAutoFit/>
+          </a:bodyPr>
+          <a:lstStyle/>
+          <a:p>
+            <a:pPr algn="l">
+              <a:lnSpc>
+                <a:spcPct val="160000"/>
+              </a:lnSpc>
+            </a:pPr>
+            <a:r>
+              <a:rPr sz="2800" b="0">
+                <a:solidFill>
+                  <a:srgbClr val="1F2937"/>
+                </a:solidFill>
+                <a:latin typeface="맑은 고딕"/>
+              </a:rPr>
+              <a:t>오늘 알게 된 점을 한 문장으로 말해 봅시다.</a:t>
+            </a:r>
+          </a:p>
+        </p:txBody>
+      </p:sp>
+    </p:spTree>
+  </p:cSld>
+  <p:clrMapOvr>
+    <a:masterClrMapping/>
+  </p:clrMapOvr>
+</p:sld>
+</file>
+
+<file path=ppt/slides/slide15.xml><?xml version="1.0" encoding="utf-8"?>
+<p:sld xmlns:a="http://schemas.openxmlformats.org/drawingml/2006/main" xmlns:p="http://schemas.openxmlformats.org/presentationml/2006/main" xmlns:r="http://schemas.openxmlformats.org/officeDocument/2006/relationships">
+  <p:cSld>
+    <p:spTree>
+      <p:nvGrpSpPr>
+        <p:cNvPr id="1" name=""/>
+        <p:cNvGrpSpPr/>
+        <p:nvPr/>
+      </p:nvGrpSpPr>
+      <p:grpSpPr/>
+      <p:sp>
+        <p:nvSpPr>
+          <p:cNvPr id="2" name="Rectangle 1"/>
+          <p:cNvSpPr/>
+          <p:nvPr/>
+        </p:nvSpPr>
+        <p:spPr>
+          <a:xfrm>
+            <a:off x="0" y="0"/>
+            <a:ext cx="201168" cy="6858000"/>
+          </a:xfrm>
+          <a:prstGeom prst="rect">
+            <a:avLst/>
+          </a:prstGeom>
+          <a:solidFill>
+            <a:srgbClr val="2563EB"/>
+          </a:solidFill>
+          <a:ln>
+            <a:noFill/>
+          </a:ln>
+          <a:effectLst/>
+        </p:spPr>
+        <p:style>
+          <a:lnRef idx="1">
+            <a:schemeClr val="accent1"/>
+          </a:lnRef>
+          <a:fillRef idx="3">
+            <a:schemeClr val="accent1"/>
+          </a:fillRef>
+          <a:effectRef idx="2">
+            <a:schemeClr val="accent1"/>
+          </a:effectRef>
+          <a:fontRef idx="minor">
+            <a:schemeClr val="lt1"/>
+          </a:fontRef>
+        </p:style>
+        <p:txBody>
+          <a:bodyPr rtlCol="0" anchor="ctr"/>
+          <a:lstStyle/>
+          <a:p>
+            <a:pPr algn="ctr"/>
+          </a:p>
+        </p:txBody>
+      </p:sp>
+      <p:sp>
+        <p:nvSpPr>
+          <p:cNvPr id="3" name="TextBox 2"/>
+          <p:cNvSpPr txBox="1"/>
+          <p:nvPr/>
+        </p:nvSpPr>
+        <p:spPr>
+          <a:xfrm>
+            <a:off x="822960" y="731520"/>
+            <a:ext cx="10545775" cy="548640"/>
+          </a:xfrm>
+          <a:prstGeom prst="rect">
+            <a:avLst/>
+          </a:prstGeom>
+          <a:noFill/>
+        </p:spPr>
+        <p:txBody>
+          <a:bodyPr wrap="square" anchor="t">
+            <a:spAutoFit/>
+          </a:bodyPr>
+          <a:lstStyle/>
+          <a:p>
+            <a:pPr algn="l">
+              <a:lnSpc>
+                <a:spcPct val="125000"/>
+              </a:lnSpc>
+            </a:pPr>
+            <a:r>
+              <a:rPr sz="2000" b="1">
+                <a:solidFill>
+                  <a:srgbClr val="2563EB"/>
+                </a:solidFill>
+                <a:latin typeface="맑은 고딕"/>
+              </a:rPr>
+              <a:t>정리 · 다음 차시 예고</a:t>
+            </a:r>
+          </a:p>
+        </p:txBody>
+      </p:sp>
+      <p:sp>
+        <p:nvSpPr>
+          <p:cNvPr id="4" name="TextBox 3"/>
+          <p:cNvSpPr txBox="1"/>
+          <p:nvPr/>
+        </p:nvSpPr>
+        <p:spPr>
+          <a:xfrm>
+            <a:off x="822960" y="1828800"/>
+            <a:ext cx="10545775" cy="3291840"/>
+          </a:xfrm>
+          <a:prstGeom prst="rect">
+            <a:avLst/>
+          </a:prstGeom>
+          <a:noFill/>
+        </p:spPr>
+        <p:txBody>
+          <a:bodyPr wrap="square" anchor="t">
+            <a:spAutoFit/>
+          </a:bodyPr>
+          <a:lstStyle/>
+          <a:p>
+            <a:pPr algn="l">
+              <a:lnSpc>
+                <a:spcPct val="160000"/>
+              </a:lnSpc>
+            </a:pPr>
+            <a:r>
+              <a:rPr sz="2800" b="0">
+                <a:solidFill>
+                  <a:srgbClr val="1F2937"/>
+                </a:solidFill>
+                <a:latin typeface="맑은 고딕"/>
+              </a:rPr>
+              <a:t>다음 시간에는 AI의 답이 늘 옳은지 확인해 봅시다.</a:t>
+            </a:r>
+          </a:p>
+        </p:txBody>
+      </p:sp>
+    </p:spTree>
+  </p:cSld>
+  <p:clrMapOvr>
+    <a:masterClrMapping/>
+  </p:clrMapOvr>
+</p:sld>
+</file>
+
+<file path=ppt/slides/slide16.xml><?xml version="1.0" encoding="utf-8"?>
+<p:sld xmlns:a="http://schemas.openxmlformats.org/drawingml/2006/main" xmlns:p="http://schemas.openxmlformats.org/presentationml/2006/main" xmlns:r="http://schemas.openxmlformats.org/officeDocument/2006/relationships">
+  <p:cSld>
+    <p:spTree>
+      <p:nvGrpSpPr>
+        <p:cNvPr id="1" name=""/>
+        <p:cNvGrpSpPr/>
+        <p:nvPr/>
+      </p:nvGrpSpPr>
+      <p:grpSpPr/>
+      <p:sp>
+        <p:nvSpPr>
+          <p:cNvPr id="2" name="Rectangle 1"/>
+          <p:cNvSpPr/>
+          <p:nvPr/>
+        </p:nvSpPr>
+        <p:spPr>
+          <a:xfrm>
+            <a:off x="0" y="0"/>
+            <a:ext cx="201168" cy="6858000"/>
+          </a:xfrm>
+          <a:prstGeom prst="rect">
+            <a:avLst/>
+          </a:prstGeom>
+          <a:solidFill>
+            <a:srgbClr val="2563EB"/>
+          </a:solidFill>
+          <a:ln>
+            <a:noFill/>
+          </a:ln>
+          <a:effectLst/>
+        </p:spPr>
+        <p:style>
+          <a:lnRef idx="1">
+            <a:schemeClr val="accent1"/>
+          </a:lnRef>
+          <a:fillRef idx="3">
+            <a:schemeClr val="accent1"/>
+          </a:fillRef>
+          <a:effectRef idx="2">
+            <a:schemeClr val="accent1"/>
+          </a:effectRef>
+          <a:fontRef idx="minor">
+            <a:schemeClr val="lt1"/>
+          </a:fontRef>
+        </p:style>
+        <p:txBody>
+          <a:bodyPr rtlCol="0" anchor="ctr"/>
+          <a:lstStyle/>
+          <a:p>
+            <a:pPr algn="ctr"/>
+          </a:p>
+        </p:txBody>
+      </p:sp>
+      <p:sp>
+        <p:nvSpPr>
           <p:cNvPr id="3" name="TextBox 2"/>
           <p:cNvSpPr txBox="1"/>
           <p:nvPr/>
@@ -5941,7 +7564,7 @@
                 </a:solidFill>
                 <a:latin typeface="맑은 고딕"/>
               </a:rPr>
-              <a:t>모둠이 모은 데이터에 라벨을 붙이고, 라벨 수를 바꿨을 때 예측 결과가 어떻게 달라지는지 기록해 비교한다.</a:t>
+              <a:t>카드에 직접 라벨을 붙여 브라우저 안의 분류기를 학습시키고, 시험 카드로 정확도를 확인한 뒤 한쪽 데이터를 줄여 다시 학습시켜 결과가 무너지는 것을 눈으로 본다.</a:t>
             </a:r>
           </a:p>
         </p:txBody>
@@ -5980,7 +7603,7 @@
                 </a:solidFill>
                 <a:latin typeface="맑은 고딕"/>
               </a:rPr>
-              <a:t>· 라벨링 기록판</a:t>
+              <a:t>· 1단계 나라면 어떻게 맞힐까</a:t>
             </a:r>
           </a:p>
           <a:p>
@@ -5996,7 +7619,7 @@
                 </a:solidFill>
                 <a:latin typeface="맑은 고딕"/>
               </a:rPr>
-              <a:t>· 데이터 수 조절 실험 기록</a:t>
+              <a:t>· 2단계 카드 20장에 라벨 붙이기</a:t>
             </a:r>
           </a:p>
           <a:p>
@@ -6012,7 +7635,7 @@
                 </a:solidFill>
                 <a:latin typeface="맑은 고딕"/>
               </a:rPr>
-              <a:t>· 사람이 한 일 / AI가 한 일 분리표</a:t>
+              <a:t>· 3단계 학습시키고 시험 보기</a:t>
             </a:r>
           </a:p>
           <a:p>
@@ -6028,7 +7651,23 @@
                 </a:solidFill>
                 <a:latin typeface="맑은 고딕"/>
               </a:rPr>
-              <a:t>· 학급 집계 화면</a:t>
+              <a:t>· 4단계 한쪽 데이터를 줄이면</a:t>
+            </a:r>
+          </a:p>
+          <a:p>
+            <a:pPr algn="l">
+              <a:lnSpc>
+                <a:spcPct val="150000"/>
+              </a:lnSpc>
+            </a:pPr>
+            <a:r>
+              <a:rPr sz="2000" b="0">
+                <a:solidFill>
+                  <a:srgbClr val="1F2937"/>
+                </a:solidFill>
+                <a:latin typeface="맑은 고딕"/>
+              </a:rPr>
+              <a:t>· 5단계 사람이 한 일과 AI가 한 일</a:t>
             </a:r>
           </a:p>
         </p:txBody>
@@ -6059,14 +7698,14 @@
         </p:nvSpPr>
         <p:spPr>
           <a:xfrm>
-            <a:off x="0" y="2103120"/>
-            <a:ext cx="12191695" cy="2377440"/>
+            <a:off x="0" y="0"/>
+            <a:ext cx="201168" cy="6858000"/>
           </a:xfrm>
           <a:prstGeom prst="rect">
             <a:avLst/>
           </a:prstGeom>
           <a:solidFill>
-            <a:srgbClr val="F3F4F6"/>
+            <a:srgbClr val="2563EB"/>
           </a:solidFill>
           <a:ln>
             <a:noFill/>
@@ -6097,14 +7736,97 @@
       </p:sp>
       <p:sp>
         <p:nvSpPr>
-          <p:cNvPr id="3" name="TextBox 2"/>
+          <p:cNvPr id="3" name="Rectangle 2"/>
+          <p:cNvSpPr/>
+          <p:nvPr/>
+        </p:nvSpPr>
+        <p:spPr>
+          <a:xfrm>
+            <a:off x="10088575" y="640080"/>
+            <a:ext cx="1280160" cy="502920"/>
+          </a:xfrm>
+          <a:prstGeom prst="rect">
+            <a:avLst/>
+          </a:prstGeom>
+          <a:solidFill>
+            <a:srgbClr val="2563EB"/>
+          </a:solidFill>
+          <a:ln>
+            <a:noFill/>
+          </a:ln>
+          <a:effectLst/>
+        </p:spPr>
+        <p:style>
+          <a:lnRef idx="1">
+            <a:schemeClr val="accent1"/>
+          </a:lnRef>
+          <a:fillRef idx="3">
+            <a:schemeClr val="accent1"/>
+          </a:fillRef>
+          <a:effectRef idx="2">
+            <a:schemeClr val="accent1"/>
+          </a:effectRef>
+          <a:fontRef idx="minor">
+            <a:schemeClr val="lt1"/>
+          </a:fontRef>
+        </p:style>
+        <p:txBody>
+          <a:bodyPr rtlCol="0" anchor="ctr"/>
+          <a:lstStyle/>
+          <a:p>
+            <a:pPr algn="ctr"/>
+          </a:p>
+        </p:txBody>
+      </p:sp>
+      <p:sp>
+        <p:nvSpPr>
+          <p:cNvPr id="4" name="TextBox 3"/>
           <p:cNvSpPr txBox="1"/>
           <p:nvPr/>
         </p:nvSpPr>
         <p:spPr>
           <a:xfrm>
-            <a:off x="822960" y="1280160"/>
-            <a:ext cx="10545775" cy="548640"/>
+            <a:off x="10088575" y="658368"/>
+            <a:ext cx="1280160" cy="457200"/>
+          </a:xfrm>
+          <a:prstGeom prst="rect">
+            <a:avLst/>
+          </a:prstGeom>
+          <a:noFill/>
+        </p:spPr>
+        <p:txBody>
+          <a:bodyPr wrap="square" anchor="t">
+            <a:spAutoFit/>
+          </a:bodyPr>
+          <a:lstStyle/>
+          <a:p>
+            <a:pPr algn="ctr">
+              <a:lnSpc>
+                <a:spcPct val="125000"/>
+              </a:lnSpc>
+            </a:pPr>
+            <a:r>
+              <a:rPr sz="2000" b="1">
+                <a:solidFill>
+                  <a:srgbClr val="FFFFFF"/>
+                </a:solidFill>
+                <a:latin typeface="맑은 고딕"/>
+              </a:rPr>
+              <a:t>4분</a:t>
+            </a:r>
+          </a:p>
+        </p:txBody>
+      </p:sp>
+      <p:sp>
+        <p:nvSpPr>
+          <p:cNvPr id="5" name="TextBox 4"/>
+          <p:cNvSpPr txBox="1"/>
+          <p:nvPr/>
+        </p:nvSpPr>
+        <p:spPr>
+          <a:xfrm>
+            <a:off x="822960" y="731520"/>
+            <a:ext cx="8351215" cy="457200"/>
           </a:xfrm>
           <a:prstGeom prst="rect">
             <a:avLst/>
@@ -6123,27 +7845,27 @@
               </a:lnSpc>
             </a:pPr>
             <a:r>
-              <a:rPr sz="2000" b="1">
+              <a:rPr sz="1800" b="1">
                 <a:solidFill>
                   <a:srgbClr val="2563EB"/>
                 </a:solidFill>
                 <a:latin typeface="맑은 고딕"/>
               </a:rPr>
-              <a:t>기기가 없어도 함께합니다</a:t>
-            </a:r>
-          </a:p>
-        </p:txBody>
-      </p:sp>
-      <p:sp>
-        <p:nvSpPr>
-          <p:cNvPr id="4" name="TextBox 3"/>
+              <a:t>1단계</a:t>
+            </a:r>
+          </a:p>
+        </p:txBody>
+      </p:sp>
+      <p:sp>
+        <p:nvSpPr>
+          <p:cNvPr id="6" name="TextBox 5"/>
           <p:cNvSpPr txBox="1"/>
           <p:nvPr/>
         </p:nvSpPr>
         <p:spPr>
           <a:xfrm>
-            <a:off x="822960" y="2560320"/>
-            <a:ext cx="10545775" cy="1645920"/>
+            <a:off x="822960" y="1371600"/>
+            <a:ext cx="10545775" cy="822960"/>
           </a:xfrm>
           <a:prstGeom prst="rect">
             <a:avLst/>
@@ -6162,13 +7884,91 @@
               </a:lnSpc>
             </a:pPr>
             <a:r>
-              <a:rPr sz="2400" b="0">
+              <a:rPr sz="3600" b="1">
                 <a:solidFill>
                   <a:srgbClr val="1F2937"/>
                 </a:solidFill>
                 <a:latin typeface="맑은 고딕"/>
               </a:rPr>
-              <a:t>기기가 부족하면 교사 시연으로 모델을 학습시키고, 학생은 인쇄한 사진 카드로 라벨링 활동을 한다.</a:t>
+              <a:t>나라면 어떻게 맞힐까</a:t>
+            </a:r>
+          </a:p>
+        </p:txBody>
+      </p:sp>
+      <p:sp>
+        <p:nvSpPr>
+          <p:cNvPr id="7" name="TextBox 6"/>
+          <p:cNvSpPr txBox="1"/>
+          <p:nvPr/>
+        </p:nvSpPr>
+        <p:spPr>
+          <a:xfrm>
+            <a:off x="822960" y="2468880"/>
+            <a:ext cx="10545775" cy="1463040"/>
+          </a:xfrm>
+          <a:prstGeom prst="rect">
+            <a:avLst/>
+          </a:prstGeom>
+          <a:noFill/>
+        </p:spPr>
+        <p:txBody>
+          <a:bodyPr wrap="square" anchor="t">
+            <a:spAutoFit/>
+          </a:bodyPr>
+          <a:lstStyle/>
+          <a:p>
+            <a:pPr algn="l">
+              <a:lnSpc>
+                <a:spcPct val="150000"/>
+              </a:lnSpc>
+            </a:pPr>
+            <a:r>
+              <a:rPr sz="2000" b="0">
+                <a:solidFill>
+                  <a:srgbClr val="6B7280"/>
+                </a:solidFill>
+                <a:latin typeface="맑은 고딕"/>
+              </a:rPr>
+              <a:t>카드 세 장을 보고 학생이 먼저 맞혀 본다. AI를 켜기 전에 사람이 무엇을 보고 판단하는지 말로 꺼낸다.</a:t>
+            </a:r>
+          </a:p>
+        </p:txBody>
+      </p:sp>
+      <p:sp>
+        <p:nvSpPr>
+          <p:cNvPr id="8" name="TextBox 7"/>
+          <p:cNvSpPr txBox="1"/>
+          <p:nvPr/>
+        </p:nvSpPr>
+        <p:spPr>
+          <a:xfrm>
+            <a:off x="822960" y="4114800"/>
+            <a:ext cx="10545775" cy="1097280"/>
+          </a:xfrm>
+          <a:prstGeom prst="rect">
+            <a:avLst/>
+          </a:prstGeom>
+          <a:noFill/>
+        </p:spPr>
+        <p:txBody>
+          <a:bodyPr wrap="square" anchor="t">
+            <a:spAutoFit/>
+          </a:bodyPr>
+          <a:lstStyle/>
+          <a:p>
+            <a:pPr algn="l">
+              <a:lnSpc>
+                <a:spcPct val="125000"/>
+              </a:lnSpc>
+            </a:pPr>
+            <a:r>
+              <a:rPr sz="2600" b="1">
+                <a:solidFill>
+                  <a:srgbClr val="1F2937"/>
+                </a:solidFill>
+                <a:latin typeface="맑은 고딕"/>
+              </a:rPr>
+              <a:t>여러분은 무엇을 보고 강아지인지 고양이인지 정했나요?</a:t>
             </a:r>
           </a:p>
         </p:txBody>
@@ -6237,14 +8037,97 @@
       </p:sp>
       <p:sp>
         <p:nvSpPr>
-          <p:cNvPr id="3" name="TextBox 2"/>
+          <p:cNvPr id="3" name="Rectangle 2"/>
+          <p:cNvSpPr/>
+          <p:nvPr/>
+        </p:nvSpPr>
+        <p:spPr>
+          <a:xfrm>
+            <a:off x="10088575" y="640080"/>
+            <a:ext cx="1280160" cy="502920"/>
+          </a:xfrm>
+          <a:prstGeom prst="rect">
+            <a:avLst/>
+          </a:prstGeom>
+          <a:solidFill>
+            <a:srgbClr val="2563EB"/>
+          </a:solidFill>
+          <a:ln>
+            <a:noFill/>
+          </a:ln>
+          <a:effectLst/>
+        </p:spPr>
+        <p:style>
+          <a:lnRef idx="1">
+            <a:schemeClr val="accent1"/>
+          </a:lnRef>
+          <a:fillRef idx="3">
+            <a:schemeClr val="accent1"/>
+          </a:fillRef>
+          <a:effectRef idx="2">
+            <a:schemeClr val="accent1"/>
+          </a:effectRef>
+          <a:fontRef idx="minor">
+            <a:schemeClr val="lt1"/>
+          </a:fontRef>
+        </p:style>
+        <p:txBody>
+          <a:bodyPr rtlCol="0" anchor="ctr"/>
+          <a:lstStyle/>
+          <a:p>
+            <a:pPr algn="ctr"/>
+          </a:p>
+        </p:txBody>
+      </p:sp>
+      <p:sp>
+        <p:nvSpPr>
+          <p:cNvPr id="4" name="TextBox 3"/>
           <p:cNvSpPr txBox="1"/>
           <p:nvPr/>
         </p:nvSpPr>
         <p:spPr>
           <a:xfrm>
+            <a:off x="10088575" y="658368"/>
+            <a:ext cx="1280160" cy="457200"/>
+          </a:xfrm>
+          <a:prstGeom prst="rect">
+            <a:avLst/>
+          </a:prstGeom>
+          <a:noFill/>
+        </p:spPr>
+        <p:txBody>
+          <a:bodyPr wrap="square" anchor="t">
+            <a:spAutoFit/>
+          </a:bodyPr>
+          <a:lstStyle/>
+          <a:p>
+            <a:pPr algn="ctr">
+              <a:lnSpc>
+                <a:spcPct val="125000"/>
+              </a:lnSpc>
+            </a:pPr>
+            <a:r>
+              <a:rPr sz="2000" b="1">
+                <a:solidFill>
+                  <a:srgbClr val="FFFFFF"/>
+                </a:solidFill>
+                <a:latin typeface="맑은 고딕"/>
+              </a:rPr>
+              <a:t>10분</a:t>
+            </a:r>
+          </a:p>
+        </p:txBody>
+      </p:sp>
+      <p:sp>
+        <p:nvSpPr>
+          <p:cNvPr id="5" name="TextBox 4"/>
+          <p:cNvSpPr txBox="1"/>
+          <p:nvPr/>
+        </p:nvSpPr>
+        <p:spPr>
+          <a:xfrm>
             <a:off x="822960" y="731520"/>
-            <a:ext cx="10545775" cy="548640"/>
+            <a:ext cx="8351215" cy="457200"/>
           </a:xfrm>
           <a:prstGeom prst="rect">
             <a:avLst/>
@@ -6263,27 +8146,27 @@
               </a:lnSpc>
             </a:pPr>
             <a:r>
-              <a:rPr sz="2000" b="1">
+              <a:rPr sz="1800" b="1">
                 <a:solidFill>
                   <a:srgbClr val="2563EB"/>
                 </a:solidFill>
                 <a:latin typeface="맑은 고딕"/>
               </a:rPr>
-              <a:t>정리 · 배움 정리</a:t>
-            </a:r>
-          </a:p>
-        </p:txBody>
-      </p:sp>
-      <p:sp>
-        <p:nvSpPr>
-          <p:cNvPr id="4" name="TextBox 3"/>
+              <a:t>2단계</a:t>
+            </a:r>
+          </a:p>
+        </p:txBody>
+      </p:sp>
+      <p:sp>
+        <p:nvSpPr>
+          <p:cNvPr id="6" name="TextBox 5"/>
           <p:cNvSpPr txBox="1"/>
           <p:nvPr/>
         </p:nvSpPr>
         <p:spPr>
           <a:xfrm>
-            <a:off x="822960" y="1828800"/>
-            <a:ext cx="10545775" cy="3291840"/>
+            <a:off x="822960" y="1371600"/>
+            <a:ext cx="10545775" cy="822960"/>
           </a:xfrm>
           <a:prstGeom prst="rect">
             <a:avLst/>
@@ -6298,17 +8181,95 @@
           <a:p>
             <a:pPr algn="l">
               <a:lnSpc>
-                <a:spcPct val="160000"/>
+                <a:spcPct val="125000"/>
               </a:lnSpc>
             </a:pPr>
             <a:r>
-              <a:rPr sz="2800" b="0">
+              <a:rPr sz="3600" b="1">
                 <a:solidFill>
                   <a:srgbClr val="1F2937"/>
                 </a:solidFill>
                 <a:latin typeface="맑은 고딕"/>
               </a:rPr>
-              <a:t>오늘 알게 된 점을 한 문장으로 말해 봅시다.</a:t>
+              <a:t>카드 20장에 라벨 붙이기</a:t>
+            </a:r>
+          </a:p>
+        </p:txBody>
+      </p:sp>
+      <p:sp>
+        <p:nvSpPr>
+          <p:cNvPr id="7" name="TextBox 6"/>
+          <p:cNvSpPr txBox="1"/>
+          <p:nvPr/>
+        </p:nvSpPr>
+        <p:spPr>
+          <a:xfrm>
+            <a:off x="822960" y="2468880"/>
+            <a:ext cx="10545775" cy="1463040"/>
+          </a:xfrm>
+          <a:prstGeom prst="rect">
+            <a:avLst/>
+          </a:prstGeom>
+          <a:noFill/>
+        </p:spPr>
+        <p:txBody>
+          <a:bodyPr wrap="square" anchor="t">
+            <a:spAutoFit/>
+          </a:bodyPr>
+          <a:lstStyle/>
+          <a:p>
+            <a:pPr algn="l">
+              <a:lnSpc>
+                <a:spcPct val="150000"/>
+              </a:lnSpc>
+            </a:pPr>
+            <a:r>
+              <a:rPr sz="2000" b="0">
+                <a:solidFill>
+                  <a:srgbClr val="6B7280"/>
+                </a:solidFill>
+                <a:latin typeface="맑은 고딕"/>
+              </a:rPr>
+              <a:t>특징만 그려진 카드 20장에 강아지 또는 고양이 이름표를 붙인다. 이것이 학습 데이터가 된다.</a:t>
+            </a:r>
+          </a:p>
+        </p:txBody>
+      </p:sp>
+      <p:sp>
+        <p:nvSpPr>
+          <p:cNvPr id="8" name="TextBox 7"/>
+          <p:cNvSpPr txBox="1"/>
+          <p:nvPr/>
+        </p:nvSpPr>
+        <p:spPr>
+          <a:xfrm>
+            <a:off x="822960" y="4114800"/>
+            <a:ext cx="10545775" cy="1097280"/>
+          </a:xfrm>
+          <a:prstGeom prst="rect">
+            <a:avLst/>
+          </a:prstGeom>
+          <a:noFill/>
+        </p:spPr>
+        <p:txBody>
+          <a:bodyPr wrap="square" anchor="t">
+            <a:spAutoFit/>
+          </a:bodyPr>
+          <a:lstStyle/>
+          <a:p>
+            <a:pPr algn="l">
+              <a:lnSpc>
+                <a:spcPct val="125000"/>
+              </a:lnSpc>
+            </a:pPr>
+            <a:r>
+              <a:rPr sz="2600" b="1">
+                <a:solidFill>
+                  <a:srgbClr val="1F2937"/>
+                </a:solidFill>
+                <a:latin typeface="맑은 고딕"/>
+              </a:rPr>
+              <a:t>이 카드 더미를 무엇이라고 부를까요?</a:t>
             </a:r>
           </a:p>
         </p:txBody>

--- a/out/ppt/WISE_L01_수업.pptx
+++ b/out/ppt/WISE_L01_수업.pptx
@@ -21,6 +21,14 @@
     <p:sldId id="269" r:id="rId21"/>
     <p:sldId id="270" r:id="rId22"/>
     <p:sldId id="271" r:id="rId23"/>
+    <p:sldId id="272" r:id="rId24"/>
+    <p:sldId id="273" r:id="rId25"/>
+    <p:sldId id="274" r:id="rId26"/>
+    <p:sldId id="275" r:id="rId27"/>
+    <p:sldId id="276" r:id="rId28"/>
+    <p:sldId id="277" r:id="rId29"/>
+    <p:sldId id="278" r:id="rId30"/>
+    <p:sldId id="279" r:id="rId31"/>
   </p:sldIdLst>
   <p:sldSz cx="12191695" cy="6858000" type="screen4x3"/>
   <p:notesSz cx="6858000" cy="9144000"/>
@@ -1122,7 +1130,232 @@
           <a:lstStyle/>
           <a:p>
             <a:r>
-              <a:t>오늘 배운 것을 학생이 한 문장으로 말하게 한다.</a:t>
+              <a:t>수업 시작 전에 방을 만들어 둔다.</a:t>
+            </a:r>
+          </a:p>
+          <a:p>
+            <a:r>
+              <a:t>학생에게는 방 번호와 닉네임만 알려 준다. 이름을 묻지 않는다.</a:t>
+            </a:r>
+          </a:p>
+        </p:txBody>
+      </p:sp>
+      <p:sp>
+        <p:nvSpPr>
+          <p:cNvPr id="4" name="Slide Number Placeholder 3"/>
+          <p:cNvSpPr>
+            <a:spLocks noGrp="1"/>
+          </p:cNvSpPr>
+          <p:nvPr>
+            <p:ph type="sldNum" idx="5" sz="quarter"/>
+          </p:nvPr>
+        </p:nvSpPr>
+        <p:spPr/>
+      </p:sp>
+    </p:spTree>
+  </p:cSld>
+  <p:clrMapOvr>
+    <a:masterClrMapping/>
+  </p:clrMapOvr>
+</p:notes>
+</file>
+
+<file path=ppt/notesSlides/notesSlide17.xml><?xml version="1.0" encoding="utf-8"?>
+<p:notes xmlns:a="http://schemas.openxmlformats.org/drawingml/2006/main" xmlns:p="http://schemas.openxmlformats.org/presentationml/2006/main" xmlns:r="http://schemas.openxmlformats.org/officeDocument/2006/relationships">
+  <p:cSld>
+    <p:spTree>
+      <p:nvGrpSpPr>
+        <p:cNvPr id="1" name=""/>
+        <p:cNvGrpSpPr/>
+        <p:nvPr/>
+      </p:nvGrpSpPr>
+      <p:grpSpPr>
+        <a:xfrm>
+          <a:off x="0" y="0"/>
+          <a:ext cx="0" cy="0"/>
+          <a:chOff x="0" y="0"/>
+          <a:chExt cx="0" cy="0"/>
+        </a:xfrm>
+      </p:grpSpPr>
+      <p:sp>
+        <p:nvSpPr>
+          <p:cNvPr id="2" name="Slide Image Placeholder 1"/>
+          <p:cNvSpPr>
+            <a:spLocks noGrp="1"/>
+          </p:cNvSpPr>
+          <p:nvPr>
+            <p:ph type="sldImg" idx="2"/>
+          </p:nvPr>
+        </p:nvSpPr>
+        <p:spPr/>
+      </p:sp>
+      <p:sp>
+        <p:nvSpPr>
+          <p:cNvPr id="3" name="Notes Placeholder 2"/>
+          <p:cNvSpPr>
+            <a:spLocks noGrp="1"/>
+          </p:cNvSpPr>
+          <p:nvPr>
+            <p:ph type="body" idx="3" sz="quarter"/>
+          </p:nvPr>
+        </p:nvSpPr>
+        <p:spPr/>
+        <p:txBody>
+          <a:bodyPr/>
+          <a:lstStyle/>
+          <a:p>
+            <a:r>
+              <a:t>학생 화면을 띄워 놓고 함께 입장한다.</a:t>
+            </a:r>
+          </a:p>
+        </p:txBody>
+      </p:sp>
+      <p:sp>
+        <p:nvSpPr>
+          <p:cNvPr id="4" name="Slide Number Placeholder 3"/>
+          <p:cNvSpPr>
+            <a:spLocks noGrp="1"/>
+          </p:cNvSpPr>
+          <p:nvPr>
+            <p:ph type="sldNum" idx="5" sz="quarter"/>
+          </p:nvPr>
+        </p:nvSpPr>
+        <p:spPr/>
+      </p:sp>
+    </p:spTree>
+  </p:cSld>
+  <p:clrMapOvr>
+    <a:masterClrMapping/>
+  </p:clrMapOvr>
+</p:notes>
+</file>
+
+<file path=ppt/notesSlides/notesSlide18.xml><?xml version="1.0" encoding="utf-8"?>
+<p:notes xmlns:a="http://schemas.openxmlformats.org/drawingml/2006/main" xmlns:p="http://schemas.openxmlformats.org/presentationml/2006/main" xmlns:r="http://schemas.openxmlformats.org/officeDocument/2006/relationships">
+  <p:cSld>
+    <p:spTree>
+      <p:nvGrpSpPr>
+        <p:cNvPr id="1" name=""/>
+        <p:cNvGrpSpPr/>
+        <p:nvPr/>
+      </p:nvGrpSpPr>
+      <p:grpSpPr>
+        <a:xfrm>
+          <a:off x="0" y="0"/>
+          <a:ext cx="0" cy="0"/>
+          <a:chOff x="0" y="0"/>
+          <a:chExt cx="0" cy="0"/>
+        </a:xfrm>
+      </p:grpSpPr>
+      <p:sp>
+        <p:nvSpPr>
+          <p:cNvPr id="2" name="Slide Image Placeholder 1"/>
+          <p:cNvSpPr>
+            <a:spLocks noGrp="1"/>
+          </p:cNvSpPr>
+          <p:nvPr>
+            <p:ph type="sldImg" idx="2"/>
+          </p:nvPr>
+        </p:nvSpPr>
+        <p:spPr/>
+      </p:sp>
+      <p:sp>
+        <p:nvSpPr>
+          <p:cNvPr id="3" name="Notes Placeholder 2"/>
+          <p:cNvSpPr>
+            <a:spLocks noGrp="1"/>
+          </p:cNvSpPr>
+          <p:nvPr>
+            <p:ph type="body" idx="3" sz="quarter"/>
+          </p:nvPr>
+        </p:nvSpPr>
+        <p:spPr/>
+        <p:txBody>
+          <a:bodyPr/>
+          <a:lstStyle/>
+          <a:p>
+            <a:r>
+              <a:t>이 화면에서 학생이 무엇을 하는지 먼저 말해 준다.</a:t>
+            </a:r>
+          </a:p>
+          <a:p>
+            <a:r>
+              <a:t>판단이 갈리는 자리에서 까닭을 묻는다.</a:t>
+            </a:r>
+          </a:p>
+        </p:txBody>
+      </p:sp>
+      <p:sp>
+        <p:nvSpPr>
+          <p:cNvPr id="4" name="Slide Number Placeholder 3"/>
+          <p:cNvSpPr>
+            <a:spLocks noGrp="1"/>
+          </p:cNvSpPr>
+          <p:nvPr>
+            <p:ph type="sldNum" idx="5" sz="quarter"/>
+          </p:nvPr>
+        </p:nvSpPr>
+        <p:spPr/>
+      </p:sp>
+    </p:spTree>
+  </p:cSld>
+  <p:clrMapOvr>
+    <a:masterClrMapping/>
+  </p:clrMapOvr>
+</p:notes>
+</file>
+
+<file path=ppt/notesSlides/notesSlide19.xml><?xml version="1.0" encoding="utf-8"?>
+<p:notes xmlns:a="http://schemas.openxmlformats.org/drawingml/2006/main" xmlns:p="http://schemas.openxmlformats.org/presentationml/2006/main" xmlns:r="http://schemas.openxmlformats.org/officeDocument/2006/relationships">
+  <p:cSld>
+    <p:spTree>
+      <p:nvGrpSpPr>
+        <p:cNvPr id="1" name=""/>
+        <p:cNvGrpSpPr/>
+        <p:nvPr/>
+      </p:nvGrpSpPr>
+      <p:grpSpPr>
+        <a:xfrm>
+          <a:off x="0" y="0"/>
+          <a:ext cx="0" cy="0"/>
+          <a:chOff x="0" y="0"/>
+          <a:chExt cx="0" cy="0"/>
+        </a:xfrm>
+      </p:grpSpPr>
+      <p:sp>
+        <p:nvSpPr>
+          <p:cNvPr id="2" name="Slide Image Placeholder 1"/>
+          <p:cNvSpPr>
+            <a:spLocks noGrp="1"/>
+          </p:cNvSpPr>
+          <p:nvPr>
+            <p:ph type="sldImg" idx="2"/>
+          </p:nvPr>
+        </p:nvSpPr>
+        <p:spPr/>
+      </p:sp>
+      <p:sp>
+        <p:nvSpPr>
+          <p:cNvPr id="3" name="Notes Placeholder 2"/>
+          <p:cNvSpPr>
+            <a:spLocks noGrp="1"/>
+          </p:cNvSpPr>
+          <p:nvPr>
+            <p:ph type="body" idx="3" sz="quarter"/>
+          </p:nvPr>
+        </p:nvSpPr>
+        <p:spPr/>
+        <p:txBody>
+          <a:bodyPr/>
+          <a:lstStyle/>
+          <a:p>
+            <a:r>
+              <a:t>이 화면에서 학생이 무엇을 하는지 먼저 말해 준다.</a:t>
+            </a:r>
+          </a:p>
+          <a:p>
+            <a:r>
+              <a:t>판단이 갈리는 자리에서 까닭을 묻는다.</a:t>
             </a:r>
           </a:p>
         </p:txBody>
@@ -1193,6 +1426,371 @@
           <a:p>
             <a:r>
               <a:t>학습 문제를 함께 소리 내어 읽는다.</a:t>
+            </a:r>
+          </a:p>
+        </p:txBody>
+      </p:sp>
+      <p:sp>
+        <p:nvSpPr>
+          <p:cNvPr id="4" name="Slide Number Placeholder 3"/>
+          <p:cNvSpPr>
+            <a:spLocks noGrp="1"/>
+          </p:cNvSpPr>
+          <p:nvPr>
+            <p:ph type="sldNum" idx="5" sz="quarter"/>
+          </p:nvPr>
+        </p:nvSpPr>
+        <p:spPr/>
+      </p:sp>
+    </p:spTree>
+  </p:cSld>
+  <p:clrMapOvr>
+    <a:masterClrMapping/>
+  </p:clrMapOvr>
+</p:notes>
+</file>
+
+<file path=ppt/notesSlides/notesSlide20.xml><?xml version="1.0" encoding="utf-8"?>
+<p:notes xmlns:a="http://schemas.openxmlformats.org/drawingml/2006/main" xmlns:p="http://schemas.openxmlformats.org/presentationml/2006/main" xmlns:r="http://schemas.openxmlformats.org/officeDocument/2006/relationships">
+  <p:cSld>
+    <p:spTree>
+      <p:nvGrpSpPr>
+        <p:cNvPr id="1" name=""/>
+        <p:cNvGrpSpPr/>
+        <p:nvPr/>
+      </p:nvGrpSpPr>
+      <p:grpSpPr>
+        <a:xfrm>
+          <a:off x="0" y="0"/>
+          <a:ext cx="0" cy="0"/>
+          <a:chOff x="0" y="0"/>
+          <a:chExt cx="0" cy="0"/>
+        </a:xfrm>
+      </p:grpSpPr>
+      <p:sp>
+        <p:nvSpPr>
+          <p:cNvPr id="2" name="Slide Image Placeholder 1"/>
+          <p:cNvSpPr>
+            <a:spLocks noGrp="1"/>
+          </p:cNvSpPr>
+          <p:nvPr>
+            <p:ph type="sldImg" idx="2"/>
+          </p:nvPr>
+        </p:nvSpPr>
+        <p:spPr/>
+      </p:sp>
+      <p:sp>
+        <p:nvSpPr>
+          <p:cNvPr id="3" name="Notes Placeholder 2"/>
+          <p:cNvSpPr>
+            <a:spLocks noGrp="1"/>
+          </p:cNvSpPr>
+          <p:nvPr>
+            <p:ph type="body" idx="3" sz="quarter"/>
+          </p:nvPr>
+        </p:nvSpPr>
+        <p:spPr/>
+        <p:txBody>
+          <a:bodyPr/>
+          <a:lstStyle/>
+          <a:p>
+            <a:r>
+              <a:t>이 화면에서 학생이 무엇을 하는지 먼저 말해 준다.</a:t>
+            </a:r>
+          </a:p>
+          <a:p>
+            <a:r>
+              <a:t>판단이 갈리는 자리에서 까닭을 묻는다.</a:t>
+            </a:r>
+          </a:p>
+        </p:txBody>
+      </p:sp>
+      <p:sp>
+        <p:nvSpPr>
+          <p:cNvPr id="4" name="Slide Number Placeholder 3"/>
+          <p:cNvSpPr>
+            <a:spLocks noGrp="1"/>
+          </p:cNvSpPr>
+          <p:nvPr>
+            <p:ph type="sldNum" idx="5" sz="quarter"/>
+          </p:nvPr>
+        </p:nvSpPr>
+        <p:spPr/>
+      </p:sp>
+    </p:spTree>
+  </p:cSld>
+  <p:clrMapOvr>
+    <a:masterClrMapping/>
+  </p:clrMapOvr>
+</p:notes>
+</file>
+
+<file path=ppt/notesSlides/notesSlide21.xml><?xml version="1.0" encoding="utf-8"?>
+<p:notes xmlns:a="http://schemas.openxmlformats.org/drawingml/2006/main" xmlns:p="http://schemas.openxmlformats.org/presentationml/2006/main" xmlns:r="http://schemas.openxmlformats.org/officeDocument/2006/relationships">
+  <p:cSld>
+    <p:spTree>
+      <p:nvGrpSpPr>
+        <p:cNvPr id="1" name=""/>
+        <p:cNvGrpSpPr/>
+        <p:nvPr/>
+      </p:nvGrpSpPr>
+      <p:grpSpPr>
+        <a:xfrm>
+          <a:off x="0" y="0"/>
+          <a:ext cx="0" cy="0"/>
+          <a:chOff x="0" y="0"/>
+          <a:chExt cx="0" cy="0"/>
+        </a:xfrm>
+      </p:grpSpPr>
+      <p:sp>
+        <p:nvSpPr>
+          <p:cNvPr id="2" name="Slide Image Placeholder 1"/>
+          <p:cNvSpPr>
+            <a:spLocks noGrp="1"/>
+          </p:cNvSpPr>
+          <p:nvPr>
+            <p:ph type="sldImg" idx="2"/>
+          </p:nvPr>
+        </p:nvSpPr>
+        <p:spPr/>
+      </p:sp>
+      <p:sp>
+        <p:nvSpPr>
+          <p:cNvPr id="3" name="Notes Placeholder 2"/>
+          <p:cNvSpPr>
+            <a:spLocks noGrp="1"/>
+          </p:cNvSpPr>
+          <p:nvPr>
+            <p:ph type="body" idx="3" sz="quarter"/>
+          </p:nvPr>
+        </p:nvSpPr>
+        <p:spPr/>
+        <p:txBody>
+          <a:bodyPr/>
+          <a:lstStyle/>
+          <a:p>
+            <a:r>
+              <a:t>이 화면에서 학생이 무엇을 하는지 먼저 말해 준다.</a:t>
+            </a:r>
+          </a:p>
+          <a:p>
+            <a:r>
+              <a:t>판단이 갈리는 자리에서 까닭을 묻는다.</a:t>
+            </a:r>
+          </a:p>
+        </p:txBody>
+      </p:sp>
+      <p:sp>
+        <p:nvSpPr>
+          <p:cNvPr id="4" name="Slide Number Placeholder 3"/>
+          <p:cNvSpPr>
+            <a:spLocks noGrp="1"/>
+          </p:cNvSpPr>
+          <p:nvPr>
+            <p:ph type="sldNum" idx="5" sz="quarter"/>
+          </p:nvPr>
+        </p:nvSpPr>
+        <p:spPr/>
+      </p:sp>
+    </p:spTree>
+  </p:cSld>
+  <p:clrMapOvr>
+    <a:masterClrMapping/>
+  </p:clrMapOvr>
+</p:notes>
+</file>
+
+<file path=ppt/notesSlides/notesSlide22.xml><?xml version="1.0" encoding="utf-8"?>
+<p:notes xmlns:a="http://schemas.openxmlformats.org/drawingml/2006/main" xmlns:p="http://schemas.openxmlformats.org/presentationml/2006/main" xmlns:r="http://schemas.openxmlformats.org/officeDocument/2006/relationships">
+  <p:cSld>
+    <p:spTree>
+      <p:nvGrpSpPr>
+        <p:cNvPr id="1" name=""/>
+        <p:cNvGrpSpPr/>
+        <p:nvPr/>
+      </p:nvGrpSpPr>
+      <p:grpSpPr>
+        <a:xfrm>
+          <a:off x="0" y="0"/>
+          <a:ext cx="0" cy="0"/>
+          <a:chOff x="0" y="0"/>
+          <a:chExt cx="0" cy="0"/>
+        </a:xfrm>
+      </p:grpSpPr>
+      <p:sp>
+        <p:nvSpPr>
+          <p:cNvPr id="2" name="Slide Image Placeholder 1"/>
+          <p:cNvSpPr>
+            <a:spLocks noGrp="1"/>
+          </p:cNvSpPr>
+          <p:nvPr>
+            <p:ph type="sldImg" idx="2"/>
+          </p:nvPr>
+        </p:nvSpPr>
+        <p:spPr/>
+      </p:sp>
+      <p:sp>
+        <p:nvSpPr>
+          <p:cNvPr id="3" name="Notes Placeholder 2"/>
+          <p:cNvSpPr>
+            <a:spLocks noGrp="1"/>
+          </p:cNvSpPr>
+          <p:nvPr>
+            <p:ph type="body" idx="3" sz="quarter"/>
+          </p:nvPr>
+        </p:nvSpPr>
+        <p:spPr/>
+        <p:txBody>
+          <a:bodyPr/>
+          <a:lstStyle/>
+          <a:p>
+            <a:r>
+              <a:t>이 화면에서 학생이 무엇을 하는지 먼저 말해 준다.</a:t>
+            </a:r>
+          </a:p>
+          <a:p>
+            <a:r>
+              <a:t>판단이 갈리는 자리에서 까닭을 묻는다.</a:t>
+            </a:r>
+          </a:p>
+        </p:txBody>
+      </p:sp>
+      <p:sp>
+        <p:nvSpPr>
+          <p:cNvPr id="4" name="Slide Number Placeholder 3"/>
+          <p:cNvSpPr>
+            <a:spLocks noGrp="1"/>
+          </p:cNvSpPr>
+          <p:nvPr>
+            <p:ph type="sldNum" idx="5" sz="quarter"/>
+          </p:nvPr>
+        </p:nvSpPr>
+        <p:spPr/>
+      </p:sp>
+    </p:spTree>
+  </p:cSld>
+  <p:clrMapOvr>
+    <a:masterClrMapping/>
+  </p:clrMapOvr>
+</p:notes>
+</file>
+
+<file path=ppt/notesSlides/notesSlide23.xml><?xml version="1.0" encoding="utf-8"?>
+<p:notes xmlns:a="http://schemas.openxmlformats.org/drawingml/2006/main" xmlns:p="http://schemas.openxmlformats.org/presentationml/2006/main" xmlns:r="http://schemas.openxmlformats.org/officeDocument/2006/relationships">
+  <p:cSld>
+    <p:spTree>
+      <p:nvGrpSpPr>
+        <p:cNvPr id="1" name=""/>
+        <p:cNvGrpSpPr/>
+        <p:nvPr/>
+      </p:nvGrpSpPr>
+      <p:grpSpPr>
+        <a:xfrm>
+          <a:off x="0" y="0"/>
+          <a:ext cx="0" cy="0"/>
+          <a:chOff x="0" y="0"/>
+          <a:chExt cx="0" cy="0"/>
+        </a:xfrm>
+      </p:grpSpPr>
+      <p:sp>
+        <p:nvSpPr>
+          <p:cNvPr id="2" name="Slide Image Placeholder 1"/>
+          <p:cNvSpPr>
+            <a:spLocks noGrp="1"/>
+          </p:cNvSpPr>
+          <p:nvPr>
+            <p:ph type="sldImg" idx="2"/>
+          </p:nvPr>
+        </p:nvSpPr>
+        <p:spPr/>
+      </p:sp>
+      <p:sp>
+        <p:nvSpPr>
+          <p:cNvPr id="3" name="Notes Placeholder 2"/>
+          <p:cNvSpPr>
+            <a:spLocks noGrp="1"/>
+          </p:cNvSpPr>
+          <p:nvPr>
+            <p:ph type="body" idx="3" sz="quarter"/>
+          </p:nvPr>
+        </p:nvSpPr>
+        <p:spPr/>
+        <p:txBody>
+          <a:bodyPr/>
+          <a:lstStyle/>
+          <a:p>
+            <a:r>
+              <a:t>제출이 모이면 갈린 항목부터 함께 본다.</a:t>
+            </a:r>
+          </a:p>
+        </p:txBody>
+      </p:sp>
+      <p:sp>
+        <p:nvSpPr>
+          <p:cNvPr id="4" name="Slide Number Placeholder 3"/>
+          <p:cNvSpPr>
+            <a:spLocks noGrp="1"/>
+          </p:cNvSpPr>
+          <p:nvPr>
+            <p:ph type="sldNum" idx="5" sz="quarter"/>
+          </p:nvPr>
+        </p:nvSpPr>
+        <p:spPr/>
+      </p:sp>
+    </p:spTree>
+  </p:cSld>
+  <p:clrMapOvr>
+    <a:masterClrMapping/>
+  </p:clrMapOvr>
+</p:notes>
+</file>
+
+<file path=ppt/notesSlides/notesSlide24.xml><?xml version="1.0" encoding="utf-8"?>
+<p:notes xmlns:a="http://schemas.openxmlformats.org/drawingml/2006/main" xmlns:p="http://schemas.openxmlformats.org/presentationml/2006/main" xmlns:r="http://schemas.openxmlformats.org/officeDocument/2006/relationships">
+  <p:cSld>
+    <p:spTree>
+      <p:nvGrpSpPr>
+        <p:cNvPr id="1" name=""/>
+        <p:cNvGrpSpPr/>
+        <p:nvPr/>
+      </p:nvGrpSpPr>
+      <p:grpSpPr>
+        <a:xfrm>
+          <a:off x="0" y="0"/>
+          <a:ext cx="0" cy="0"/>
+          <a:chOff x="0" y="0"/>
+          <a:chExt cx="0" cy="0"/>
+        </a:xfrm>
+      </p:grpSpPr>
+      <p:sp>
+        <p:nvSpPr>
+          <p:cNvPr id="2" name="Slide Image Placeholder 1"/>
+          <p:cNvSpPr>
+            <a:spLocks noGrp="1"/>
+          </p:cNvSpPr>
+          <p:nvPr>
+            <p:ph type="sldImg" idx="2"/>
+          </p:nvPr>
+        </p:nvSpPr>
+        <p:spPr/>
+      </p:sp>
+      <p:sp>
+        <p:nvSpPr>
+          <p:cNvPr id="3" name="Notes Placeholder 2"/>
+          <p:cNvSpPr>
+            <a:spLocks noGrp="1"/>
+          </p:cNvSpPr>
+          <p:nvPr>
+            <p:ph type="body" idx="3" sz="quarter"/>
+          </p:nvPr>
+        </p:nvSpPr>
+        <p:spPr/>
+        <p:txBody>
+          <a:bodyPr/>
+          <a:lstStyle/>
+          <a:p>
+            <a:r>
+              <a:t>오늘 배운 것을 학생이 한 문장으로 말하게 한다.</a:t>
             </a:r>
           </a:p>
         </p:txBody>
@@ -6517,7 +7115,7 @@
         </p:nvSpPr>
         <p:spPr>
           <a:xfrm>
-            <a:off x="822960" y="914400"/>
+            <a:off x="822960" y="731520"/>
             <a:ext cx="10545775" cy="548640"/>
           </a:xfrm>
           <a:prstGeom prst="rect">
@@ -6543,7 +7141,7 @@
                 </a:solidFill>
                 <a:latin typeface="맑은 고딕"/>
               </a:rPr>
-              <a:t>오늘의 배움</a:t>
+              <a:t>웹앱으로 합니다</a:t>
             </a:r>
           </a:p>
         </p:txBody>
@@ -6556,8 +7154,283 @@
         </p:nvSpPr>
         <p:spPr>
           <a:xfrm>
-            <a:off x="822960" y="1828800"/>
-            <a:ext cx="10545775" cy="2926080"/>
+            <a:off x="822960" y="1463040"/>
+            <a:ext cx="6766560" cy="1097280"/>
+          </a:xfrm>
+          <a:prstGeom prst="rect">
+            <a:avLst/>
+          </a:prstGeom>
+          <a:noFill/>
+        </p:spPr>
+        <p:txBody>
+          <a:bodyPr wrap="square" anchor="t">
+            <a:spAutoFit/>
+          </a:bodyPr>
+          <a:lstStyle/>
+          <a:p>
+            <a:pPr algn="l">
+              <a:lnSpc>
+                <a:spcPct val="125000"/>
+              </a:lnSpc>
+            </a:pPr>
+            <a:r>
+              <a:rPr sz="4000" b="1">
+                <a:solidFill>
+                  <a:srgbClr val="1F2937"/>
+                </a:solidFill>
+                <a:latin typeface="맑은 고딕"/>
+              </a:rPr>
+              <a:t>데이터 실험실</a:t>
+            </a:r>
+          </a:p>
+        </p:txBody>
+      </p:sp>
+      <p:sp>
+        <p:nvSpPr>
+          <p:cNvPr id="5" name="TextBox 4"/>
+          <p:cNvSpPr txBox="1"/>
+          <p:nvPr/>
+        </p:nvSpPr>
+        <p:spPr>
+          <a:xfrm>
+            <a:off x="822960" y="2651760"/>
+            <a:ext cx="6766560" cy="2194560"/>
+          </a:xfrm>
+          <a:prstGeom prst="rect">
+            <a:avLst/>
+          </a:prstGeom>
+          <a:noFill/>
+        </p:spPr>
+        <p:txBody>
+          <a:bodyPr wrap="square" anchor="t">
+            <a:spAutoFit/>
+          </a:bodyPr>
+          <a:lstStyle/>
+          <a:p>
+            <a:pPr algn="l">
+              <a:lnSpc>
+                <a:spcPct val="150000"/>
+              </a:lnSpc>
+            </a:pPr>
+            <a:r>
+              <a:rPr sz="1800" b="0">
+                <a:solidFill>
+                  <a:srgbClr val="1F2937"/>
+                </a:solidFill>
+                <a:latin typeface="맑은 고딕"/>
+              </a:rPr>
+              <a:t>카드에 직접 라벨을 붙여 브라우저 안의 분류기를 학습시키고, 시험 카드로 정확도를 확인한 뒤 한쪽 데이터를 줄여 다시 학습시켜 결과가 무너지는 것을 눈으로 본다.</a:t>
+            </a:r>
+          </a:p>
+          <a:p>
+            <a:pPr algn="l">
+              <a:lnSpc>
+                <a:spcPct val="150000"/>
+              </a:lnSpc>
+            </a:pPr>
+            <a:r>
+              <a:rPr sz="1800" b="0">
+                <a:solidFill>
+                  <a:srgbClr val="1F2937"/>
+                </a:solidFill>
+                <a:latin typeface="맑은 고딕"/>
+              </a:rPr>
+              <a:t>수업 전에 선생님 화면 → 새 방 만들기 → 방 번호를 칠판에 적는다.</a:t>
+            </a:r>
+          </a:p>
+          <a:p>
+            <a:pPr algn="l">
+              <a:lnSpc>
+                <a:spcPct val="150000"/>
+              </a:lnSpc>
+            </a:pPr>
+            <a:r>
+              <a:rPr sz="1800" b="0">
+                <a:solidFill>
+                  <a:srgbClr val="1F2937"/>
+                </a:solidFill>
+                <a:latin typeface="맑은 고딕"/>
+              </a:rPr>
+              <a:t>학생은 QR 을 찍거나 주소를 열고 방 번호와 닉네임을 넣는다.</a:t>
+            </a:r>
+          </a:p>
+          <a:p>
+            <a:pPr algn="l">
+              <a:lnSpc>
+                <a:spcPct val="150000"/>
+              </a:lnSpc>
+            </a:pPr>
+            <a:r>
+              <a:rPr sz="1800" b="0">
+                <a:solidFill>
+                  <a:srgbClr val="1F2937"/>
+                </a:solidFill>
+                <a:latin typeface="맑은 고딕"/>
+              </a:rPr>
+              <a:t>https://legoschool.github.io/wise-ai/webapp/L01/</a:t>
+            </a:r>
+          </a:p>
+        </p:txBody>
+      </p:sp>
+      <p:pic>
+        <p:nvPicPr>
+          <p:cNvPr id="6" name="Picture 5" descr="L01.png"/>
+          <p:cNvPicPr>
+            <a:picLocks noChangeAspect="1"/>
+          </p:cNvPicPr>
+          <p:nvPr/>
+        </p:nvPicPr>
+        <p:blipFill>
+          <a:blip r:embed="rId2"/>
+          <a:stretch>
+            <a:fillRect/>
+          </a:stretch>
+        </p:blipFill>
+        <p:spPr>
+          <a:xfrm>
+            <a:off x="8412480" y="1828800"/>
+            <a:ext cx="2743200" cy="2743200"/>
+          </a:xfrm>
+          <a:prstGeom prst="rect">
+            <a:avLst/>
+          </a:prstGeom>
+        </p:spPr>
+      </p:pic>
+    </p:spTree>
+  </p:cSld>
+  <p:clrMapOvr>
+    <a:masterClrMapping/>
+  </p:clrMapOvr>
+</p:sld>
+</file>
+
+<file path=ppt/slides/slide17.xml><?xml version="1.0" encoding="utf-8"?>
+<p:sld xmlns:a="http://schemas.openxmlformats.org/drawingml/2006/main" xmlns:p="http://schemas.openxmlformats.org/presentationml/2006/main" xmlns:r="http://schemas.openxmlformats.org/officeDocument/2006/relationships">
+  <p:cSld>
+    <p:spTree>
+      <p:nvGrpSpPr>
+        <p:cNvPr id="1" name=""/>
+        <p:cNvGrpSpPr/>
+        <p:nvPr/>
+      </p:nvGrpSpPr>
+      <p:grpSpPr/>
+      <p:sp>
+        <p:nvSpPr>
+          <p:cNvPr id="2" name="Rectangle 1"/>
+          <p:cNvSpPr/>
+          <p:nvPr/>
+        </p:nvSpPr>
+        <p:spPr>
+          <a:xfrm>
+            <a:off x="0" y="0"/>
+            <a:ext cx="201168" cy="6858000"/>
+          </a:xfrm>
+          <a:prstGeom prst="rect">
+            <a:avLst/>
+          </a:prstGeom>
+          <a:solidFill>
+            <a:srgbClr val="2563EB"/>
+          </a:solidFill>
+          <a:ln>
+            <a:noFill/>
+          </a:ln>
+          <a:effectLst/>
+        </p:spPr>
+        <p:style>
+          <a:lnRef idx="1">
+            <a:schemeClr val="accent1"/>
+          </a:lnRef>
+          <a:fillRef idx="3">
+            <a:schemeClr val="accent1"/>
+          </a:fillRef>
+          <a:effectRef idx="2">
+            <a:schemeClr val="accent1"/>
+          </a:effectRef>
+          <a:fontRef idx="minor">
+            <a:schemeClr val="lt1"/>
+          </a:fontRef>
+        </p:style>
+        <p:txBody>
+          <a:bodyPr rtlCol="0" anchor="ctr"/>
+          <a:lstStyle/>
+          <a:p>
+            <a:pPr algn="ctr"/>
+          </a:p>
+        </p:txBody>
+      </p:sp>
+      <p:sp>
+        <p:nvSpPr>
+          <p:cNvPr id="3" name="TextBox 2"/>
+          <p:cNvSpPr txBox="1"/>
+          <p:nvPr/>
+        </p:nvSpPr>
+        <p:spPr>
+          <a:xfrm>
+            <a:off x="822960" y="640080"/>
+            <a:ext cx="10545775" cy="548640"/>
+          </a:xfrm>
+          <a:prstGeom prst="rect">
+            <a:avLst/>
+          </a:prstGeom>
+          <a:noFill/>
+        </p:spPr>
+        <p:txBody>
+          <a:bodyPr wrap="square" anchor="t">
+            <a:spAutoFit/>
+          </a:bodyPr>
+          <a:lstStyle/>
+          <a:p>
+            <a:pPr algn="l">
+              <a:lnSpc>
+                <a:spcPct val="125000"/>
+              </a:lnSpc>
+            </a:pPr>
+            <a:r>
+              <a:rPr sz="2000" b="1">
+                <a:solidFill>
+                  <a:srgbClr val="2563EB"/>
+                </a:solidFill>
+                <a:latin typeface="맑은 고딕"/>
+              </a:rPr>
+              <a:t>학생 입장 화면</a:t>
+            </a:r>
+          </a:p>
+        </p:txBody>
+      </p:sp>
+      <p:pic>
+        <p:nvPicPr>
+          <p:cNvPr id="4" name="Picture 3" descr="L01_0_입장.png"/>
+          <p:cNvPicPr>
+            <a:picLocks noChangeAspect="1"/>
+          </p:cNvPicPr>
+          <p:nvPr/>
+        </p:nvPicPr>
+        <p:blipFill>
+          <a:blip r:embed="rId2"/>
+          <a:stretch>
+            <a:fillRect/>
+          </a:stretch>
+        </p:blipFill>
+        <p:spPr>
+          <a:xfrm>
+            <a:off x="822960" y="1280160"/>
+            <a:ext cx="4293704" cy="4937760"/>
+          </a:xfrm>
+          <a:prstGeom prst="rect">
+            <a:avLst/>
+          </a:prstGeom>
+        </p:spPr>
+      </p:pic>
+      <p:sp>
+        <p:nvSpPr>
+          <p:cNvPr id="5" name="TextBox 4"/>
+          <p:cNvSpPr txBox="1"/>
+          <p:nvPr/>
+        </p:nvSpPr>
+        <p:spPr>
+          <a:xfrm>
+            <a:off x="6949440" y="1463040"/>
+            <a:ext cx="4754880" cy="3291840"/>
           </a:xfrm>
           <a:prstGeom prst="rect">
             <a:avLst/>
@@ -6576,13 +7449,13 @@
               </a:lnSpc>
             </a:pPr>
             <a:r>
-              <a:rPr sz="2400" b="0">
+              <a:rPr sz="2000" b="0">
                 <a:solidFill>
                   <a:srgbClr val="1F2937"/>
                 </a:solidFill>
                 <a:latin typeface="맑은 고딕"/>
               </a:rPr>
-              <a:t>· AI는 사람이 준 데이터로 배우며, 데이터가 치우치면 결과도 치우친다.</a:t>
+              <a:t>방 번호 여섯 자리와 닉네임만 넣는다.</a:t>
             </a:r>
           </a:p>
           <a:p>
@@ -6592,27 +7465,105 @@
               </a:lnSpc>
             </a:pPr>
             <a:r>
-              <a:rPr sz="2400" b="0">
+              <a:rPr sz="2000" b="0">
                 <a:solidFill>
                   <a:srgbClr val="1F2937"/>
                 </a:solidFill>
                 <a:latin typeface="맑은 고딕"/>
               </a:rPr>
-              <a:t>· 문제의 성격을 파악하고 AI 활용이 적합한지 판단하는 것이 문제 분석이다.</a:t>
-            </a:r>
-          </a:p>
-        </p:txBody>
-      </p:sp>
-      <p:sp>
-        <p:nvSpPr>
-          <p:cNvPr id="5" name="TextBox 4"/>
+              <a:t>나만 아는 숫자 네 자리는 사전과 사후 설문을 잇는 데만 쓴다.</a:t>
+            </a:r>
+          </a:p>
+          <a:p>
+            <a:pPr algn="l">
+              <a:lnSpc>
+                <a:spcPct val="160000"/>
+              </a:lnSpc>
+            </a:pPr>
+            <a:r>
+              <a:rPr sz="2000" b="0">
+                <a:solidFill>
+                  <a:srgbClr val="1F2937"/>
+                </a:solidFill>
+                <a:latin typeface="맑은 고딕"/>
+              </a:rPr>
+              <a:t>기기가 없으면 둘러보기로 교사가 시연한다.</a:t>
+            </a:r>
+          </a:p>
+        </p:txBody>
+      </p:sp>
+    </p:spTree>
+  </p:cSld>
+  <p:clrMapOvr>
+    <a:masterClrMapping/>
+  </p:clrMapOvr>
+</p:sld>
+</file>
+
+<file path=ppt/slides/slide18.xml><?xml version="1.0" encoding="utf-8"?>
+<p:sld xmlns:a="http://schemas.openxmlformats.org/drawingml/2006/main" xmlns:p="http://schemas.openxmlformats.org/presentationml/2006/main" xmlns:r="http://schemas.openxmlformats.org/officeDocument/2006/relationships">
+  <p:cSld>
+    <p:spTree>
+      <p:nvGrpSpPr>
+        <p:cNvPr id="1" name=""/>
+        <p:cNvGrpSpPr/>
+        <p:nvPr/>
+      </p:nvGrpSpPr>
+      <p:grpSpPr/>
+      <p:sp>
+        <p:nvSpPr>
+          <p:cNvPr id="2" name="Rectangle 1"/>
+          <p:cNvSpPr/>
+          <p:nvPr/>
+        </p:nvSpPr>
+        <p:spPr>
+          <a:xfrm>
+            <a:off x="0" y="0"/>
+            <a:ext cx="201168" cy="6858000"/>
+          </a:xfrm>
+          <a:prstGeom prst="rect">
+            <a:avLst/>
+          </a:prstGeom>
+          <a:solidFill>
+            <a:srgbClr val="2563EB"/>
+          </a:solidFill>
+          <a:ln>
+            <a:noFill/>
+          </a:ln>
+          <a:effectLst/>
+        </p:spPr>
+        <p:style>
+          <a:lnRef idx="1">
+            <a:schemeClr val="accent1"/>
+          </a:lnRef>
+          <a:fillRef idx="3">
+            <a:schemeClr val="accent1"/>
+          </a:fillRef>
+          <a:effectRef idx="2">
+            <a:schemeClr val="accent1"/>
+          </a:effectRef>
+          <a:fontRef idx="minor">
+            <a:schemeClr val="lt1"/>
+          </a:fontRef>
+        </p:style>
+        <p:txBody>
+          <a:bodyPr rtlCol="0" anchor="ctr"/>
+          <a:lstStyle/>
+          <a:p>
+            <a:pPr algn="ctr"/>
+          </a:p>
+        </p:txBody>
+      </p:sp>
+      <p:sp>
+        <p:nvSpPr>
+          <p:cNvPr id="3" name="TextBox 2"/>
           <p:cNvSpPr txBox="1"/>
           <p:nvPr/>
         </p:nvSpPr>
         <p:spPr>
           <a:xfrm>
-            <a:off x="822960" y="5943600"/>
-            <a:ext cx="10545775" cy="457200"/>
+            <a:off x="822960" y="640080"/>
+            <a:ext cx="10545775" cy="548640"/>
           </a:xfrm>
           <a:prstGeom prst="rect">
             <a:avLst/>
@@ -6631,13 +7582,272 @@
               </a:lnSpc>
             </a:pPr>
             <a:r>
-              <a:rPr sz="1200" b="0">
+              <a:rPr sz="2000" b="1">
                 <a:solidFill>
-                  <a:srgbClr val="6B7280"/>
+                  <a:srgbClr val="2563EB"/>
                 </a:solidFill>
                 <a:latin typeface="맑은 고딕"/>
               </a:rPr>
-              <a:t>2026년 티처스랩 5기 교사연구회 A.N.D · CC BY-NC-SA</a:t>
+              <a:t>웹앱 1단계 · 허브</a:t>
+            </a:r>
+          </a:p>
+        </p:txBody>
+      </p:sp>
+      <p:pic>
+        <p:nvPicPr>
+          <p:cNvPr id="4" name="Picture 3" descr="L01_2_hub.png"/>
+          <p:cNvPicPr>
+            <a:picLocks noChangeAspect="1"/>
+          </p:cNvPicPr>
+          <p:nvPr/>
+        </p:nvPicPr>
+        <p:blipFill>
+          <a:blip r:embed="rId2"/>
+          <a:stretch>
+            <a:fillRect/>
+          </a:stretch>
+        </p:blipFill>
+        <p:spPr>
+          <a:xfrm>
+            <a:off x="822960" y="1280160"/>
+            <a:ext cx="3526971" cy="4937760"/>
+          </a:xfrm>
+          <a:prstGeom prst="rect">
+            <a:avLst/>
+          </a:prstGeom>
+        </p:spPr>
+      </p:pic>
+      <p:sp>
+        <p:nvSpPr>
+          <p:cNvPr id="5" name="TextBox 4"/>
+          <p:cNvSpPr txBox="1"/>
+          <p:nvPr/>
+        </p:nvSpPr>
+        <p:spPr>
+          <a:xfrm>
+            <a:off x="6949440" y="1645920"/>
+            <a:ext cx="4754880" cy="2926080"/>
+          </a:xfrm>
+          <a:prstGeom prst="rect">
+            <a:avLst/>
+          </a:prstGeom>
+          <a:noFill/>
+        </p:spPr>
+        <p:txBody>
+          <a:bodyPr wrap="square" anchor="t">
+            <a:spAutoFit/>
+          </a:bodyPr>
+          <a:lstStyle/>
+          <a:p>
+            <a:pPr algn="l">
+              <a:lnSpc>
+                <a:spcPct val="160000"/>
+              </a:lnSpc>
+            </a:pPr>
+            <a:r>
+              <a:rPr sz="2200" b="0">
+                <a:solidFill>
+                  <a:srgbClr val="1F2937"/>
+                </a:solidFill>
+                <a:latin typeface="맑은 고딕"/>
+              </a:rPr>
+              <a:t>1단계 나라면 어떻게 맞힐까</a:t>
+            </a:r>
+          </a:p>
+          <a:p>
+            <a:pPr algn="l">
+              <a:lnSpc>
+                <a:spcPct val="160000"/>
+              </a:lnSpc>
+            </a:pPr>
+            <a:r>
+              <a:rPr sz="2200" b="0">
+                <a:solidFill>
+                  <a:srgbClr val="1F2937"/>
+                </a:solidFill>
+                <a:latin typeface="맑은 고딕"/>
+              </a:rPr>
+              <a:t>학생이 여기서 남긴 것이 활동지와 이어진다.</a:t>
+            </a:r>
+          </a:p>
+        </p:txBody>
+      </p:sp>
+    </p:spTree>
+  </p:cSld>
+  <p:clrMapOvr>
+    <a:masterClrMapping/>
+  </p:clrMapOvr>
+</p:sld>
+</file>
+
+<file path=ppt/slides/slide19.xml><?xml version="1.0" encoding="utf-8"?>
+<p:sld xmlns:a="http://schemas.openxmlformats.org/drawingml/2006/main" xmlns:p="http://schemas.openxmlformats.org/presentationml/2006/main" xmlns:r="http://schemas.openxmlformats.org/officeDocument/2006/relationships">
+  <p:cSld>
+    <p:spTree>
+      <p:nvGrpSpPr>
+        <p:cNvPr id="1" name=""/>
+        <p:cNvGrpSpPr/>
+        <p:nvPr/>
+      </p:nvGrpSpPr>
+      <p:grpSpPr/>
+      <p:sp>
+        <p:nvSpPr>
+          <p:cNvPr id="2" name="Rectangle 1"/>
+          <p:cNvSpPr/>
+          <p:nvPr/>
+        </p:nvSpPr>
+        <p:spPr>
+          <a:xfrm>
+            <a:off x="0" y="0"/>
+            <a:ext cx="201168" cy="6858000"/>
+          </a:xfrm>
+          <a:prstGeom prst="rect">
+            <a:avLst/>
+          </a:prstGeom>
+          <a:solidFill>
+            <a:srgbClr val="2563EB"/>
+          </a:solidFill>
+          <a:ln>
+            <a:noFill/>
+          </a:ln>
+          <a:effectLst/>
+        </p:spPr>
+        <p:style>
+          <a:lnRef idx="1">
+            <a:schemeClr val="accent1"/>
+          </a:lnRef>
+          <a:fillRef idx="3">
+            <a:schemeClr val="accent1"/>
+          </a:fillRef>
+          <a:effectRef idx="2">
+            <a:schemeClr val="accent1"/>
+          </a:effectRef>
+          <a:fontRef idx="minor">
+            <a:schemeClr val="lt1"/>
+          </a:fontRef>
+        </p:style>
+        <p:txBody>
+          <a:bodyPr rtlCol="0" anchor="ctr"/>
+          <a:lstStyle/>
+          <a:p>
+            <a:pPr algn="ctr"/>
+          </a:p>
+        </p:txBody>
+      </p:sp>
+      <p:sp>
+        <p:nvSpPr>
+          <p:cNvPr id="3" name="TextBox 2"/>
+          <p:cNvSpPr txBox="1"/>
+          <p:nvPr/>
+        </p:nvSpPr>
+        <p:spPr>
+          <a:xfrm>
+            <a:off x="822960" y="640080"/>
+            <a:ext cx="10545775" cy="548640"/>
+          </a:xfrm>
+          <a:prstGeom prst="rect">
+            <a:avLst/>
+          </a:prstGeom>
+          <a:noFill/>
+        </p:spPr>
+        <p:txBody>
+          <a:bodyPr wrap="square" anchor="t">
+            <a:spAutoFit/>
+          </a:bodyPr>
+          <a:lstStyle/>
+          <a:p>
+            <a:pPr algn="l">
+              <a:lnSpc>
+                <a:spcPct val="125000"/>
+              </a:lnSpc>
+            </a:pPr>
+            <a:r>
+              <a:rPr sz="2000" b="1">
+                <a:solidFill>
+                  <a:srgbClr val="2563EB"/>
+                </a:solidFill>
+                <a:latin typeface="맑은 고딕"/>
+              </a:rPr>
+              <a:t>웹앱 2단계 · pre</a:t>
+            </a:r>
+          </a:p>
+        </p:txBody>
+      </p:sp>
+      <p:pic>
+        <p:nvPicPr>
+          <p:cNvPr id="4" name="Picture 3" descr="L01_3_pre.png"/>
+          <p:cNvPicPr>
+            <a:picLocks noChangeAspect="1"/>
+          </p:cNvPicPr>
+          <p:nvPr/>
+        </p:nvPicPr>
+        <p:blipFill>
+          <a:blip r:embed="rId2"/>
+          <a:stretch>
+            <a:fillRect/>
+          </a:stretch>
+        </p:blipFill>
+        <p:spPr>
+          <a:xfrm>
+            <a:off x="822960" y="1280160"/>
+            <a:ext cx="3526971" cy="4937760"/>
+          </a:xfrm>
+          <a:prstGeom prst="rect">
+            <a:avLst/>
+          </a:prstGeom>
+        </p:spPr>
+      </p:pic>
+      <p:sp>
+        <p:nvSpPr>
+          <p:cNvPr id="5" name="TextBox 4"/>
+          <p:cNvSpPr txBox="1"/>
+          <p:nvPr/>
+        </p:nvSpPr>
+        <p:spPr>
+          <a:xfrm>
+            <a:off x="6949440" y="1645920"/>
+            <a:ext cx="4754880" cy="2926080"/>
+          </a:xfrm>
+          <a:prstGeom prst="rect">
+            <a:avLst/>
+          </a:prstGeom>
+          <a:noFill/>
+        </p:spPr>
+        <p:txBody>
+          <a:bodyPr wrap="square" anchor="t">
+            <a:spAutoFit/>
+          </a:bodyPr>
+          <a:lstStyle/>
+          <a:p>
+            <a:pPr algn="l">
+              <a:lnSpc>
+                <a:spcPct val="160000"/>
+              </a:lnSpc>
+            </a:pPr>
+            <a:r>
+              <a:rPr sz="2200" b="0">
+                <a:solidFill>
+                  <a:srgbClr val="1F2937"/>
+                </a:solidFill>
+                <a:latin typeface="맑은 고딕"/>
+              </a:rPr>
+              <a:t>2단계 카드 20장에 라벨 붙이기</a:t>
+            </a:r>
+          </a:p>
+          <a:p>
+            <a:pPr algn="l">
+              <a:lnSpc>
+                <a:spcPct val="160000"/>
+              </a:lnSpc>
+            </a:pPr>
+            <a:r>
+              <a:rPr sz="2200" b="0">
+                <a:solidFill>
+                  <a:srgbClr val="1F2937"/>
+                </a:solidFill>
+                <a:latin typeface="맑은 고딕"/>
+              </a:rPr>
+              <a:t>학생이 여기서 남긴 것이 활동지와 이어진다.</a:t>
             </a:r>
           </a:p>
         </p:txBody>
@@ -6778,6 +7988,913 @@
                 <a:latin typeface="맑은 고딕"/>
               </a:rPr>
               <a:t>AI가 어떻게 배우는지 알아보고, AI가 우리의 생각을 도와주는지 대신해 주는지 생각해 봅시다.</a:t>
+            </a:r>
+          </a:p>
+        </p:txBody>
+      </p:sp>
+    </p:spTree>
+  </p:cSld>
+  <p:clrMapOvr>
+    <a:masterClrMapping/>
+  </p:clrMapOvr>
+</p:sld>
+</file>
+
+<file path=ppt/slides/slide20.xml><?xml version="1.0" encoding="utf-8"?>
+<p:sld xmlns:a="http://schemas.openxmlformats.org/drawingml/2006/main" xmlns:p="http://schemas.openxmlformats.org/presentationml/2006/main" xmlns:r="http://schemas.openxmlformats.org/officeDocument/2006/relationships">
+  <p:cSld>
+    <p:spTree>
+      <p:nvGrpSpPr>
+        <p:cNvPr id="1" name=""/>
+        <p:cNvGrpSpPr/>
+        <p:nvPr/>
+      </p:nvGrpSpPr>
+      <p:grpSpPr/>
+      <p:sp>
+        <p:nvSpPr>
+          <p:cNvPr id="2" name="Rectangle 1"/>
+          <p:cNvSpPr/>
+          <p:nvPr/>
+        </p:nvSpPr>
+        <p:spPr>
+          <a:xfrm>
+            <a:off x="0" y="0"/>
+            <a:ext cx="201168" cy="6858000"/>
+          </a:xfrm>
+          <a:prstGeom prst="rect">
+            <a:avLst/>
+          </a:prstGeom>
+          <a:solidFill>
+            <a:srgbClr val="2563EB"/>
+          </a:solidFill>
+          <a:ln>
+            <a:noFill/>
+          </a:ln>
+          <a:effectLst/>
+        </p:spPr>
+        <p:style>
+          <a:lnRef idx="1">
+            <a:schemeClr val="accent1"/>
+          </a:lnRef>
+          <a:fillRef idx="3">
+            <a:schemeClr val="accent1"/>
+          </a:fillRef>
+          <a:effectRef idx="2">
+            <a:schemeClr val="accent1"/>
+          </a:effectRef>
+          <a:fontRef idx="minor">
+            <a:schemeClr val="lt1"/>
+          </a:fontRef>
+        </p:style>
+        <p:txBody>
+          <a:bodyPr rtlCol="0" anchor="ctr"/>
+          <a:lstStyle/>
+          <a:p>
+            <a:pPr algn="ctr"/>
+          </a:p>
+        </p:txBody>
+      </p:sp>
+      <p:sp>
+        <p:nvSpPr>
+          <p:cNvPr id="3" name="TextBox 2"/>
+          <p:cNvSpPr txBox="1"/>
+          <p:nvPr/>
+        </p:nvSpPr>
+        <p:spPr>
+          <a:xfrm>
+            <a:off x="822960" y="640080"/>
+            <a:ext cx="10545775" cy="548640"/>
+          </a:xfrm>
+          <a:prstGeom prst="rect">
+            <a:avLst/>
+          </a:prstGeom>
+          <a:noFill/>
+        </p:spPr>
+        <p:txBody>
+          <a:bodyPr wrap="square" anchor="t">
+            <a:spAutoFit/>
+          </a:bodyPr>
+          <a:lstStyle/>
+          <a:p>
+            <a:pPr algn="l">
+              <a:lnSpc>
+                <a:spcPct val="125000"/>
+              </a:lnSpc>
+            </a:pPr>
+            <a:r>
+              <a:rPr sz="2000" b="1">
+                <a:solidFill>
+                  <a:srgbClr val="2563EB"/>
+                </a:solidFill>
+                <a:latin typeface="맑은 고딕"/>
+              </a:rPr>
+              <a:t>웹앱 3단계 · 이름표 붙이기</a:t>
+            </a:r>
+          </a:p>
+        </p:txBody>
+      </p:sp>
+      <p:pic>
+        <p:nvPicPr>
+          <p:cNvPr id="4" name="Picture 3" descr="L01_4_label.png"/>
+          <p:cNvPicPr>
+            <a:picLocks noChangeAspect="1"/>
+          </p:cNvPicPr>
+          <p:nvPr/>
+        </p:nvPicPr>
+        <p:blipFill>
+          <a:blip r:embed="rId2"/>
+          <a:stretch>
+            <a:fillRect/>
+          </a:stretch>
+        </p:blipFill>
+        <p:spPr>
+          <a:xfrm>
+            <a:off x="822960" y="1280160"/>
+            <a:ext cx="3526971" cy="4937760"/>
+          </a:xfrm>
+          <a:prstGeom prst="rect">
+            <a:avLst/>
+          </a:prstGeom>
+        </p:spPr>
+      </p:pic>
+      <p:sp>
+        <p:nvSpPr>
+          <p:cNvPr id="5" name="TextBox 4"/>
+          <p:cNvSpPr txBox="1"/>
+          <p:nvPr/>
+        </p:nvSpPr>
+        <p:spPr>
+          <a:xfrm>
+            <a:off x="6949440" y="1645920"/>
+            <a:ext cx="4754880" cy="2926080"/>
+          </a:xfrm>
+          <a:prstGeom prst="rect">
+            <a:avLst/>
+          </a:prstGeom>
+          <a:noFill/>
+        </p:spPr>
+        <p:txBody>
+          <a:bodyPr wrap="square" anchor="t">
+            <a:spAutoFit/>
+          </a:bodyPr>
+          <a:lstStyle/>
+          <a:p>
+            <a:pPr algn="l">
+              <a:lnSpc>
+                <a:spcPct val="160000"/>
+              </a:lnSpc>
+            </a:pPr>
+            <a:r>
+              <a:rPr sz="2200" b="0">
+                <a:solidFill>
+                  <a:srgbClr val="1F2937"/>
+                </a:solidFill>
+                <a:latin typeface="맑은 고딕"/>
+              </a:rPr>
+              <a:t>3단계 학습시키고 시험 보기</a:t>
+            </a:r>
+          </a:p>
+          <a:p>
+            <a:pPr algn="l">
+              <a:lnSpc>
+                <a:spcPct val="160000"/>
+              </a:lnSpc>
+            </a:pPr>
+            <a:r>
+              <a:rPr sz="2200" b="0">
+                <a:solidFill>
+                  <a:srgbClr val="1F2937"/>
+                </a:solidFill>
+                <a:latin typeface="맑은 고딕"/>
+              </a:rPr>
+              <a:t>학생이 여기서 남긴 것이 활동지와 이어진다.</a:t>
+            </a:r>
+          </a:p>
+        </p:txBody>
+      </p:sp>
+    </p:spTree>
+  </p:cSld>
+  <p:clrMapOvr>
+    <a:masterClrMapping/>
+  </p:clrMapOvr>
+</p:sld>
+</file>
+
+<file path=ppt/slides/slide21.xml><?xml version="1.0" encoding="utf-8"?>
+<p:sld xmlns:a="http://schemas.openxmlformats.org/drawingml/2006/main" xmlns:p="http://schemas.openxmlformats.org/presentationml/2006/main" xmlns:r="http://schemas.openxmlformats.org/officeDocument/2006/relationships">
+  <p:cSld>
+    <p:spTree>
+      <p:nvGrpSpPr>
+        <p:cNvPr id="1" name=""/>
+        <p:cNvGrpSpPr/>
+        <p:nvPr/>
+      </p:nvGrpSpPr>
+      <p:grpSpPr/>
+      <p:sp>
+        <p:nvSpPr>
+          <p:cNvPr id="2" name="Rectangle 1"/>
+          <p:cNvSpPr/>
+          <p:nvPr/>
+        </p:nvSpPr>
+        <p:spPr>
+          <a:xfrm>
+            <a:off x="0" y="0"/>
+            <a:ext cx="201168" cy="6858000"/>
+          </a:xfrm>
+          <a:prstGeom prst="rect">
+            <a:avLst/>
+          </a:prstGeom>
+          <a:solidFill>
+            <a:srgbClr val="2563EB"/>
+          </a:solidFill>
+          <a:ln>
+            <a:noFill/>
+          </a:ln>
+          <a:effectLst/>
+        </p:spPr>
+        <p:style>
+          <a:lnRef idx="1">
+            <a:schemeClr val="accent1"/>
+          </a:lnRef>
+          <a:fillRef idx="3">
+            <a:schemeClr val="accent1"/>
+          </a:fillRef>
+          <a:effectRef idx="2">
+            <a:schemeClr val="accent1"/>
+          </a:effectRef>
+          <a:fontRef idx="minor">
+            <a:schemeClr val="lt1"/>
+          </a:fontRef>
+        </p:style>
+        <p:txBody>
+          <a:bodyPr rtlCol="0" anchor="ctr"/>
+          <a:lstStyle/>
+          <a:p>
+            <a:pPr algn="ctr"/>
+          </a:p>
+        </p:txBody>
+      </p:sp>
+      <p:sp>
+        <p:nvSpPr>
+          <p:cNvPr id="3" name="TextBox 2"/>
+          <p:cNvSpPr txBox="1"/>
+          <p:nvPr/>
+        </p:nvSpPr>
+        <p:spPr>
+          <a:xfrm>
+            <a:off x="822960" y="640080"/>
+            <a:ext cx="10545775" cy="548640"/>
+          </a:xfrm>
+          <a:prstGeom prst="rect">
+            <a:avLst/>
+          </a:prstGeom>
+          <a:noFill/>
+        </p:spPr>
+        <p:txBody>
+          <a:bodyPr wrap="square" anchor="t">
+            <a:spAutoFit/>
+          </a:bodyPr>
+          <a:lstStyle/>
+          <a:p>
+            <a:pPr algn="l">
+              <a:lnSpc>
+                <a:spcPct val="125000"/>
+              </a:lnSpc>
+            </a:pPr>
+            <a:r>
+              <a:rPr sz="2000" b="1">
+                <a:solidFill>
+                  <a:srgbClr val="2563EB"/>
+                </a:solidFill>
+                <a:latin typeface="맑은 고딕"/>
+              </a:rPr>
+              <a:t>웹앱 4단계 · exam</a:t>
+            </a:r>
+          </a:p>
+        </p:txBody>
+      </p:sp>
+      <p:pic>
+        <p:nvPicPr>
+          <p:cNvPr id="4" name="Picture 3" descr="L01_5_exam.png"/>
+          <p:cNvPicPr>
+            <a:picLocks noChangeAspect="1"/>
+          </p:cNvPicPr>
+          <p:nvPr/>
+        </p:nvPicPr>
+        <p:blipFill>
+          <a:blip r:embed="rId2"/>
+          <a:stretch>
+            <a:fillRect/>
+          </a:stretch>
+        </p:blipFill>
+        <p:spPr>
+          <a:xfrm>
+            <a:off x="822960" y="1280160"/>
+            <a:ext cx="3526971" cy="4937760"/>
+          </a:xfrm>
+          <a:prstGeom prst="rect">
+            <a:avLst/>
+          </a:prstGeom>
+        </p:spPr>
+      </p:pic>
+      <p:sp>
+        <p:nvSpPr>
+          <p:cNvPr id="5" name="TextBox 4"/>
+          <p:cNvSpPr txBox="1"/>
+          <p:nvPr/>
+        </p:nvSpPr>
+        <p:spPr>
+          <a:xfrm>
+            <a:off x="6949440" y="1645920"/>
+            <a:ext cx="4754880" cy="2926080"/>
+          </a:xfrm>
+          <a:prstGeom prst="rect">
+            <a:avLst/>
+          </a:prstGeom>
+          <a:noFill/>
+        </p:spPr>
+        <p:txBody>
+          <a:bodyPr wrap="square" anchor="t">
+            <a:spAutoFit/>
+          </a:bodyPr>
+          <a:lstStyle/>
+          <a:p>
+            <a:pPr algn="l">
+              <a:lnSpc>
+                <a:spcPct val="160000"/>
+              </a:lnSpc>
+            </a:pPr>
+            <a:r>
+              <a:rPr sz="2200" b="0">
+                <a:solidFill>
+                  <a:srgbClr val="1F2937"/>
+                </a:solidFill>
+                <a:latin typeface="맑은 고딕"/>
+              </a:rPr>
+              <a:t>4단계 한쪽 데이터를 줄이면</a:t>
+            </a:r>
+          </a:p>
+          <a:p>
+            <a:pPr algn="l">
+              <a:lnSpc>
+                <a:spcPct val="160000"/>
+              </a:lnSpc>
+            </a:pPr>
+            <a:r>
+              <a:rPr sz="2200" b="0">
+                <a:solidFill>
+                  <a:srgbClr val="1F2937"/>
+                </a:solidFill>
+                <a:latin typeface="맑은 고딕"/>
+              </a:rPr>
+              <a:t>학생이 여기서 남긴 것이 활동지와 이어진다.</a:t>
+            </a:r>
+          </a:p>
+        </p:txBody>
+      </p:sp>
+    </p:spTree>
+  </p:cSld>
+  <p:clrMapOvr>
+    <a:masterClrMapping/>
+  </p:clrMapOvr>
+</p:sld>
+</file>
+
+<file path=ppt/slides/slide22.xml><?xml version="1.0" encoding="utf-8"?>
+<p:sld xmlns:a="http://schemas.openxmlformats.org/drawingml/2006/main" xmlns:p="http://schemas.openxmlformats.org/presentationml/2006/main" xmlns:r="http://schemas.openxmlformats.org/officeDocument/2006/relationships">
+  <p:cSld>
+    <p:spTree>
+      <p:nvGrpSpPr>
+        <p:cNvPr id="1" name=""/>
+        <p:cNvGrpSpPr/>
+        <p:nvPr/>
+      </p:nvGrpSpPr>
+      <p:grpSpPr/>
+      <p:sp>
+        <p:nvSpPr>
+          <p:cNvPr id="2" name="Rectangle 1"/>
+          <p:cNvSpPr/>
+          <p:nvPr/>
+        </p:nvSpPr>
+        <p:spPr>
+          <a:xfrm>
+            <a:off x="0" y="0"/>
+            <a:ext cx="201168" cy="6858000"/>
+          </a:xfrm>
+          <a:prstGeom prst="rect">
+            <a:avLst/>
+          </a:prstGeom>
+          <a:solidFill>
+            <a:srgbClr val="2563EB"/>
+          </a:solidFill>
+          <a:ln>
+            <a:noFill/>
+          </a:ln>
+          <a:effectLst/>
+        </p:spPr>
+        <p:style>
+          <a:lnRef idx="1">
+            <a:schemeClr val="accent1"/>
+          </a:lnRef>
+          <a:fillRef idx="3">
+            <a:schemeClr val="accent1"/>
+          </a:fillRef>
+          <a:effectRef idx="2">
+            <a:schemeClr val="accent1"/>
+          </a:effectRef>
+          <a:fontRef idx="minor">
+            <a:schemeClr val="lt1"/>
+          </a:fontRef>
+        </p:style>
+        <p:txBody>
+          <a:bodyPr rtlCol="0" anchor="ctr"/>
+          <a:lstStyle/>
+          <a:p>
+            <a:pPr algn="ctr"/>
+          </a:p>
+        </p:txBody>
+      </p:sp>
+      <p:sp>
+        <p:nvSpPr>
+          <p:cNvPr id="3" name="TextBox 2"/>
+          <p:cNvSpPr txBox="1"/>
+          <p:nvPr/>
+        </p:nvSpPr>
+        <p:spPr>
+          <a:xfrm>
+            <a:off x="822960" y="640080"/>
+            <a:ext cx="10545775" cy="548640"/>
+          </a:xfrm>
+          <a:prstGeom prst="rect">
+            <a:avLst/>
+          </a:prstGeom>
+          <a:noFill/>
+        </p:spPr>
+        <p:txBody>
+          <a:bodyPr wrap="square" anchor="t">
+            <a:spAutoFit/>
+          </a:bodyPr>
+          <a:lstStyle/>
+          <a:p>
+            <a:pPr algn="l">
+              <a:lnSpc>
+                <a:spcPct val="125000"/>
+              </a:lnSpc>
+            </a:pPr>
+            <a:r>
+              <a:rPr sz="2000" b="1">
+                <a:solidFill>
+                  <a:srgbClr val="2563EB"/>
+                </a:solidFill>
+                <a:latin typeface="맑은 고딕"/>
+              </a:rPr>
+              <a:t>웹앱 5단계 · cut</a:t>
+            </a:r>
+          </a:p>
+        </p:txBody>
+      </p:sp>
+      <p:pic>
+        <p:nvPicPr>
+          <p:cNvPr id="4" name="Picture 3" descr="L01_6_cut.png"/>
+          <p:cNvPicPr>
+            <a:picLocks noChangeAspect="1"/>
+          </p:cNvPicPr>
+          <p:nvPr/>
+        </p:nvPicPr>
+        <p:blipFill>
+          <a:blip r:embed="rId2"/>
+          <a:stretch>
+            <a:fillRect/>
+          </a:stretch>
+        </p:blipFill>
+        <p:spPr>
+          <a:xfrm>
+            <a:off x="822960" y="1280160"/>
+            <a:ext cx="3526971" cy="4937760"/>
+          </a:xfrm>
+          <a:prstGeom prst="rect">
+            <a:avLst/>
+          </a:prstGeom>
+        </p:spPr>
+      </p:pic>
+      <p:sp>
+        <p:nvSpPr>
+          <p:cNvPr id="5" name="TextBox 4"/>
+          <p:cNvSpPr txBox="1"/>
+          <p:nvPr/>
+        </p:nvSpPr>
+        <p:spPr>
+          <a:xfrm>
+            <a:off x="6949440" y="1645920"/>
+            <a:ext cx="4754880" cy="2926080"/>
+          </a:xfrm>
+          <a:prstGeom prst="rect">
+            <a:avLst/>
+          </a:prstGeom>
+          <a:noFill/>
+        </p:spPr>
+        <p:txBody>
+          <a:bodyPr wrap="square" anchor="t">
+            <a:spAutoFit/>
+          </a:bodyPr>
+          <a:lstStyle/>
+          <a:p>
+            <a:pPr algn="l">
+              <a:lnSpc>
+                <a:spcPct val="160000"/>
+              </a:lnSpc>
+            </a:pPr>
+            <a:r>
+              <a:rPr sz="2200" b="0">
+                <a:solidFill>
+                  <a:srgbClr val="1F2937"/>
+                </a:solidFill>
+                <a:latin typeface="맑은 고딕"/>
+              </a:rPr>
+              <a:t>5단계 사람이 한 일과 AI가 한 일</a:t>
+            </a:r>
+          </a:p>
+          <a:p>
+            <a:pPr algn="l">
+              <a:lnSpc>
+                <a:spcPct val="160000"/>
+              </a:lnSpc>
+            </a:pPr>
+            <a:r>
+              <a:rPr sz="2200" b="0">
+                <a:solidFill>
+                  <a:srgbClr val="1F2937"/>
+                </a:solidFill>
+                <a:latin typeface="맑은 고딕"/>
+              </a:rPr>
+              <a:t>학생이 여기서 남긴 것이 활동지와 이어진다.</a:t>
+            </a:r>
+          </a:p>
+        </p:txBody>
+      </p:sp>
+    </p:spTree>
+  </p:cSld>
+  <p:clrMapOvr>
+    <a:masterClrMapping/>
+  </p:clrMapOvr>
+</p:sld>
+</file>
+
+<file path=ppt/slides/slide23.xml><?xml version="1.0" encoding="utf-8"?>
+<p:sld xmlns:a="http://schemas.openxmlformats.org/drawingml/2006/main" xmlns:p="http://schemas.openxmlformats.org/presentationml/2006/main" xmlns:r="http://schemas.openxmlformats.org/officeDocument/2006/relationships">
+  <p:cSld>
+    <p:spTree>
+      <p:nvGrpSpPr>
+        <p:cNvPr id="1" name=""/>
+        <p:cNvGrpSpPr/>
+        <p:nvPr/>
+      </p:nvGrpSpPr>
+      <p:grpSpPr/>
+      <p:sp>
+        <p:nvSpPr>
+          <p:cNvPr id="2" name="Rectangle 1"/>
+          <p:cNvSpPr/>
+          <p:nvPr/>
+        </p:nvSpPr>
+        <p:spPr>
+          <a:xfrm>
+            <a:off x="0" y="0"/>
+            <a:ext cx="201168" cy="6858000"/>
+          </a:xfrm>
+          <a:prstGeom prst="rect">
+            <a:avLst/>
+          </a:prstGeom>
+          <a:solidFill>
+            <a:srgbClr val="2563EB"/>
+          </a:solidFill>
+          <a:ln>
+            <a:noFill/>
+          </a:ln>
+          <a:effectLst/>
+        </p:spPr>
+        <p:style>
+          <a:lnRef idx="1">
+            <a:schemeClr val="accent1"/>
+          </a:lnRef>
+          <a:fillRef idx="3">
+            <a:schemeClr val="accent1"/>
+          </a:fillRef>
+          <a:effectRef idx="2">
+            <a:schemeClr val="accent1"/>
+          </a:effectRef>
+          <a:fontRef idx="minor">
+            <a:schemeClr val="lt1"/>
+          </a:fontRef>
+        </p:style>
+        <p:txBody>
+          <a:bodyPr rtlCol="0" anchor="ctr"/>
+          <a:lstStyle/>
+          <a:p>
+            <a:pPr algn="ctr"/>
+          </a:p>
+        </p:txBody>
+      </p:sp>
+      <p:sp>
+        <p:nvSpPr>
+          <p:cNvPr id="3" name="TextBox 2"/>
+          <p:cNvSpPr txBox="1"/>
+          <p:nvPr/>
+        </p:nvSpPr>
+        <p:spPr>
+          <a:xfrm>
+            <a:off x="822960" y="914400"/>
+            <a:ext cx="10545775" cy="548640"/>
+          </a:xfrm>
+          <a:prstGeom prst="rect">
+            <a:avLst/>
+          </a:prstGeom>
+          <a:noFill/>
+        </p:spPr>
+        <p:txBody>
+          <a:bodyPr wrap="square" anchor="t">
+            <a:spAutoFit/>
+          </a:bodyPr>
+          <a:lstStyle/>
+          <a:p>
+            <a:pPr algn="l">
+              <a:lnSpc>
+                <a:spcPct val="125000"/>
+              </a:lnSpc>
+            </a:pPr>
+            <a:r>
+              <a:rPr sz="2000" b="1">
+                <a:solidFill>
+                  <a:srgbClr val="2563EB"/>
+                </a:solidFill>
+                <a:latin typeface="맑은 고딕"/>
+              </a:rPr>
+              <a:t>교사 화면</a:t>
+            </a:r>
+          </a:p>
+        </p:txBody>
+      </p:sp>
+      <p:sp>
+        <p:nvSpPr>
+          <p:cNvPr id="4" name="TextBox 3"/>
+          <p:cNvSpPr txBox="1"/>
+          <p:nvPr/>
+        </p:nvSpPr>
+        <p:spPr>
+          <a:xfrm>
+            <a:off x="822960" y="1828800"/>
+            <a:ext cx="10545775" cy="2926080"/>
+          </a:xfrm>
+          <a:prstGeom prst="rect">
+            <a:avLst/>
+          </a:prstGeom>
+          <a:noFill/>
+        </p:spPr>
+        <p:txBody>
+          <a:bodyPr wrap="square" anchor="t">
+            <a:spAutoFit/>
+          </a:bodyPr>
+          <a:lstStyle/>
+          <a:p>
+            <a:pPr algn="l">
+              <a:lnSpc>
+                <a:spcPct val="160000"/>
+              </a:lnSpc>
+            </a:pPr>
+            <a:r>
+              <a:rPr sz="2400" b="0">
+                <a:solidFill>
+                  <a:srgbClr val="1F2937"/>
+                </a:solidFill>
+                <a:latin typeface="맑은 고딕"/>
+              </a:rPr>
+              <a:t>학급 평균 정확도, 데이터를 줄였을 때 평균 정확도, 라벨이 갈린 카드, 배움 문장 모음</a:t>
+            </a:r>
+          </a:p>
+          <a:p>
+            <a:pPr algn="l">
+              <a:lnSpc>
+                <a:spcPct val="160000"/>
+              </a:lnSpc>
+            </a:pPr>
+            <a:r>
+              <a:rPr sz="2400" b="0">
+                <a:solidFill>
+                  <a:srgbClr val="1F2937"/>
+                </a:solidFill>
+                <a:latin typeface="맑은 고딕"/>
+              </a:rPr>
+              <a:t>결과 크게 띄우기를 누르면 학급 화면으로 함께 본다.</a:t>
+            </a:r>
+          </a:p>
+          <a:p>
+            <a:pPr algn="l">
+              <a:lnSpc>
+                <a:spcPct val="160000"/>
+              </a:lnSpc>
+            </a:pPr>
+            <a:r>
+              <a:rPr sz="2400" b="0">
+                <a:solidFill>
+                  <a:srgbClr val="1F2937"/>
+                </a:solidFill>
+                <a:latin typeface="맑은 고딕"/>
+              </a:rPr>
+              <a:t>CSV 로 내려받고, 수업이 끝나면 방을 잠근다.</a:t>
+            </a:r>
+          </a:p>
+        </p:txBody>
+      </p:sp>
+    </p:spTree>
+  </p:cSld>
+  <p:clrMapOvr>
+    <a:masterClrMapping/>
+  </p:clrMapOvr>
+</p:sld>
+</file>
+
+<file path=ppt/slides/slide24.xml><?xml version="1.0" encoding="utf-8"?>
+<p:sld xmlns:a="http://schemas.openxmlformats.org/drawingml/2006/main" xmlns:p="http://schemas.openxmlformats.org/presentationml/2006/main" xmlns:r="http://schemas.openxmlformats.org/officeDocument/2006/relationships">
+  <p:cSld>
+    <p:spTree>
+      <p:nvGrpSpPr>
+        <p:cNvPr id="1" name=""/>
+        <p:cNvGrpSpPr/>
+        <p:nvPr/>
+      </p:nvGrpSpPr>
+      <p:grpSpPr/>
+      <p:sp>
+        <p:nvSpPr>
+          <p:cNvPr id="2" name="Rectangle 1"/>
+          <p:cNvSpPr/>
+          <p:nvPr/>
+        </p:nvSpPr>
+        <p:spPr>
+          <a:xfrm>
+            <a:off x="0" y="0"/>
+            <a:ext cx="201168" cy="6858000"/>
+          </a:xfrm>
+          <a:prstGeom prst="rect">
+            <a:avLst/>
+          </a:prstGeom>
+          <a:solidFill>
+            <a:srgbClr val="2563EB"/>
+          </a:solidFill>
+          <a:ln>
+            <a:noFill/>
+          </a:ln>
+          <a:effectLst/>
+        </p:spPr>
+        <p:style>
+          <a:lnRef idx="1">
+            <a:schemeClr val="accent1"/>
+          </a:lnRef>
+          <a:fillRef idx="3">
+            <a:schemeClr val="accent1"/>
+          </a:fillRef>
+          <a:effectRef idx="2">
+            <a:schemeClr val="accent1"/>
+          </a:effectRef>
+          <a:fontRef idx="minor">
+            <a:schemeClr val="lt1"/>
+          </a:fontRef>
+        </p:style>
+        <p:txBody>
+          <a:bodyPr rtlCol="0" anchor="ctr"/>
+          <a:lstStyle/>
+          <a:p>
+            <a:pPr algn="ctr"/>
+          </a:p>
+        </p:txBody>
+      </p:sp>
+      <p:sp>
+        <p:nvSpPr>
+          <p:cNvPr id="3" name="TextBox 2"/>
+          <p:cNvSpPr txBox="1"/>
+          <p:nvPr/>
+        </p:nvSpPr>
+        <p:spPr>
+          <a:xfrm>
+            <a:off x="822960" y="914400"/>
+            <a:ext cx="10545775" cy="548640"/>
+          </a:xfrm>
+          <a:prstGeom prst="rect">
+            <a:avLst/>
+          </a:prstGeom>
+          <a:noFill/>
+        </p:spPr>
+        <p:txBody>
+          <a:bodyPr wrap="square" anchor="t">
+            <a:spAutoFit/>
+          </a:bodyPr>
+          <a:lstStyle/>
+          <a:p>
+            <a:pPr algn="l">
+              <a:lnSpc>
+                <a:spcPct val="125000"/>
+              </a:lnSpc>
+            </a:pPr>
+            <a:r>
+              <a:rPr sz="2000" b="1">
+                <a:solidFill>
+                  <a:srgbClr val="2563EB"/>
+                </a:solidFill>
+                <a:latin typeface="맑은 고딕"/>
+              </a:rPr>
+              <a:t>오늘의 배움</a:t>
+            </a:r>
+          </a:p>
+        </p:txBody>
+      </p:sp>
+      <p:sp>
+        <p:nvSpPr>
+          <p:cNvPr id="4" name="TextBox 3"/>
+          <p:cNvSpPr txBox="1"/>
+          <p:nvPr/>
+        </p:nvSpPr>
+        <p:spPr>
+          <a:xfrm>
+            <a:off x="822960" y="1828800"/>
+            <a:ext cx="10545775" cy="2926080"/>
+          </a:xfrm>
+          <a:prstGeom prst="rect">
+            <a:avLst/>
+          </a:prstGeom>
+          <a:noFill/>
+        </p:spPr>
+        <p:txBody>
+          <a:bodyPr wrap="square" anchor="t">
+            <a:spAutoFit/>
+          </a:bodyPr>
+          <a:lstStyle/>
+          <a:p>
+            <a:pPr algn="l">
+              <a:lnSpc>
+                <a:spcPct val="160000"/>
+              </a:lnSpc>
+            </a:pPr>
+            <a:r>
+              <a:rPr sz="2400" b="0">
+                <a:solidFill>
+                  <a:srgbClr val="1F2937"/>
+                </a:solidFill>
+                <a:latin typeface="맑은 고딕"/>
+              </a:rPr>
+              <a:t>· AI는 사람이 준 데이터로 배우며, 데이터가 치우치면 결과도 치우친다.</a:t>
+            </a:r>
+          </a:p>
+          <a:p>
+            <a:pPr algn="l">
+              <a:lnSpc>
+                <a:spcPct val="160000"/>
+              </a:lnSpc>
+            </a:pPr>
+            <a:r>
+              <a:rPr sz="2400" b="0">
+                <a:solidFill>
+                  <a:srgbClr val="1F2937"/>
+                </a:solidFill>
+                <a:latin typeface="맑은 고딕"/>
+              </a:rPr>
+              <a:t>· 문제의 성격을 파악하고 AI 활용이 적합한지 판단하는 것이 문제 분석이다.</a:t>
+            </a:r>
+          </a:p>
+        </p:txBody>
+      </p:sp>
+      <p:sp>
+        <p:nvSpPr>
+          <p:cNvPr id="5" name="TextBox 4"/>
+          <p:cNvSpPr txBox="1"/>
+          <p:nvPr/>
+        </p:nvSpPr>
+        <p:spPr>
+          <a:xfrm>
+            <a:off x="822960" y="5943600"/>
+            <a:ext cx="10545775" cy="457200"/>
+          </a:xfrm>
+          <a:prstGeom prst="rect">
+            <a:avLst/>
+          </a:prstGeom>
+          <a:noFill/>
+        </p:spPr>
+        <p:txBody>
+          <a:bodyPr wrap="square" anchor="t">
+            <a:spAutoFit/>
+          </a:bodyPr>
+          <a:lstStyle/>
+          <a:p>
+            <a:pPr algn="l">
+              <a:lnSpc>
+                <a:spcPct val="125000"/>
+              </a:lnSpc>
+            </a:pPr>
+            <a:r>
+              <a:rPr sz="1200" b="0">
+                <a:solidFill>
+                  <a:srgbClr val="6B7280"/>
+                </a:solidFill>
+                <a:latin typeface="맑은 고딕"/>
+              </a:rPr>
+              <a:t>2026년 티처스랩 5기 교사연구회 A.N.D · CC BY-NC-SA</a:t>
             </a:r>
           </a:p>
         </p:txBody>

--- a/out/ppt/WISE_L01_수업.pptx
+++ b/out/ppt/WISE_L01_수업.pptx
@@ -5717,7 +5717,7 @@
                 </a:solidFill>
                 <a:latin typeface="맑은 고딕"/>
               </a:rPr>
-              <a:t>2026년 티처스랩 5기 교사연구회 A.N.D · CC BY-NC-SA</a:t>
+              <a:t>2026년 G-DEAL A.N.D · CC BY-NC-SA</a:t>
             </a:r>
           </a:p>
         </p:txBody>
@@ -8894,7 +8894,7 @@
                 </a:solidFill>
                 <a:latin typeface="맑은 고딕"/>
               </a:rPr>
-              <a:t>2026년 티처스랩 5기 교사연구회 A.N.D · CC BY-NC-SA</a:t>
+              <a:t>2026년 G-DEAL A.N.D · CC BY-NC-SA</a:t>
             </a:r>
           </a:p>
         </p:txBody>
